--- a/docs/AgentForge-PresentationV9.pptx
+++ b/docs/AgentForge-PresentationV9.pptx
@@ -33,18 +33,18 @@
     <p:sldId id="282" r:id="rId27"/>
     <p:sldId id="283" r:id="rId28"/>
     <p:sldId id="284" r:id="rId29"/>
-    <p:sldId id="293" r:id="rId43"/>
-    <p:sldId id="294" r:id="rId44"/>
-    <p:sldId id="295" r:id="rId45"/>
-    <p:sldId id="285" r:id="rId30"/>
-    <p:sldId id="286" r:id="rId31"/>
-    <p:sldId id="287" r:id="rId32"/>
-    <p:sldId id="288" r:id="rId33"/>
-    <p:sldId id="289" r:id="rId34"/>
-    <p:sldId id="290" r:id="rId35"/>
-    <p:sldId id="291" r:id="rId36"/>
-    <p:sldId id="292" r:id="rId37"/>
-    <p:sldId id="281" r:id="rId38"/>
+    <p:sldId id="293" r:id="rId30"/>
+    <p:sldId id="294" r:id="rId31"/>
+    <p:sldId id="295" r:id="rId32"/>
+    <p:sldId id="285" r:id="rId33"/>
+    <p:sldId id="286" r:id="rId34"/>
+    <p:sldId id="287" r:id="rId35"/>
+    <p:sldId id="288" r:id="rId36"/>
+    <p:sldId id="289" r:id="rId37"/>
+    <p:sldId id="290" r:id="rId38"/>
+    <p:sldId id="291" r:id="rId39"/>
+    <p:sldId id="292" r:id="rId40"/>
+    <p:sldId id="281" r:id="rId41"/>
   </p:sldIdLst>
   <p:sldSz cx="12188825" cy="6858000"/>
   <p:notesSz cx="6858000" cy="9144000"/>
@@ -341,7 +341,7 @@
           <a:p>
             <a:fld id="{5BCAD085-E8A6-8845-BD4E-CB4CCA059FC4}" type="datetimeFigureOut">
               <a:rPr lang="en-US" smtClean="0"/>
-              <a:t>7/20/2026</a:t>
+              <a:t>7/22/2026</a:t>
             </a:fld>
             <a:endParaRPr lang="en-US"/>
           </a:p>
@@ -509,7 +509,7 @@
           <a:p>
             <a:fld id="{5BCAD085-E8A6-8845-BD4E-CB4CCA059FC4}" type="datetimeFigureOut">
               <a:rPr lang="en-US" smtClean="0"/>
-              <a:t>7/20/2026</a:t>
+              <a:t>7/22/2026</a:t>
             </a:fld>
             <a:endParaRPr lang="en-US"/>
           </a:p>
@@ -687,7 +687,7 @@
           <a:p>
             <a:fld id="{5BCAD085-E8A6-8845-BD4E-CB4CCA059FC4}" type="datetimeFigureOut">
               <a:rPr lang="en-US" smtClean="0"/>
-              <a:t>7/20/2026</a:t>
+              <a:t>7/22/2026</a:t>
             </a:fld>
             <a:endParaRPr lang="en-US"/>
           </a:p>
@@ -855,7 +855,7 @@
           <a:p>
             <a:fld id="{5BCAD085-E8A6-8845-BD4E-CB4CCA059FC4}" type="datetimeFigureOut">
               <a:rPr lang="en-US" smtClean="0"/>
-              <a:t>7/20/2026</a:t>
+              <a:t>7/22/2026</a:t>
             </a:fld>
             <a:endParaRPr lang="en-US"/>
           </a:p>
@@ -1100,7 +1100,7 @@
           <a:p>
             <a:fld id="{5BCAD085-E8A6-8845-BD4E-CB4CCA059FC4}" type="datetimeFigureOut">
               <a:rPr lang="en-US" smtClean="0"/>
-              <a:t>7/20/2026</a:t>
+              <a:t>7/22/2026</a:t>
             </a:fld>
             <a:endParaRPr lang="en-US"/>
           </a:p>
@@ -1385,7 +1385,7 @@
           <a:p>
             <a:fld id="{5BCAD085-E8A6-8845-BD4E-CB4CCA059FC4}" type="datetimeFigureOut">
               <a:rPr lang="en-US" smtClean="0"/>
-              <a:t>7/20/2026</a:t>
+              <a:t>7/22/2026</a:t>
             </a:fld>
             <a:endParaRPr lang="en-US"/>
           </a:p>
@@ -1804,7 +1804,7 @@
           <a:p>
             <a:fld id="{5BCAD085-E8A6-8845-BD4E-CB4CCA059FC4}" type="datetimeFigureOut">
               <a:rPr lang="en-US" smtClean="0"/>
-              <a:t>7/20/2026</a:t>
+              <a:t>7/22/2026</a:t>
             </a:fld>
             <a:endParaRPr lang="en-US"/>
           </a:p>
@@ -1921,7 +1921,7 @@
           <a:p>
             <a:fld id="{5BCAD085-E8A6-8845-BD4E-CB4CCA059FC4}" type="datetimeFigureOut">
               <a:rPr lang="en-US" smtClean="0"/>
-              <a:t>7/20/2026</a:t>
+              <a:t>7/22/2026</a:t>
             </a:fld>
             <a:endParaRPr lang="en-US"/>
           </a:p>
@@ -2016,7 +2016,7 @@
           <a:p>
             <a:fld id="{5BCAD085-E8A6-8845-BD4E-CB4CCA059FC4}" type="datetimeFigureOut">
               <a:rPr lang="en-US" smtClean="0"/>
-              <a:t>7/20/2026</a:t>
+              <a:t>7/22/2026</a:t>
             </a:fld>
             <a:endParaRPr lang="en-US"/>
           </a:p>
@@ -2291,7 +2291,7 @@
           <a:p>
             <a:fld id="{5BCAD085-E8A6-8845-BD4E-CB4CCA059FC4}" type="datetimeFigureOut">
               <a:rPr lang="en-US" smtClean="0"/>
-              <a:t>7/20/2026</a:t>
+              <a:t>7/22/2026</a:t>
             </a:fld>
             <a:endParaRPr lang="en-US"/>
           </a:p>
@@ -2543,7 +2543,7 @@
           <a:p>
             <a:fld id="{5BCAD085-E8A6-8845-BD4E-CB4CCA059FC4}" type="datetimeFigureOut">
               <a:rPr lang="en-US" smtClean="0"/>
-              <a:t>7/20/2026</a:t>
+              <a:t>7/22/2026</a:t>
             </a:fld>
             <a:endParaRPr lang="en-US"/>
           </a:p>
@@ -2754,7 +2754,7 @@
           <a:p>
             <a:fld id="{5BCAD085-E8A6-8845-BD4E-CB4CCA059FC4}" type="datetimeFigureOut">
               <a:rPr lang="en-US" smtClean="0"/>
-              <a:t>7/20/2026</a:t>
+              <a:t>7/22/2026</a:t>
             </a:fld>
             <a:endParaRPr lang="en-US"/>
           </a:p>
@@ -3553,7 +3553,7 @@
           <a:p>
             <a:pPr algn="ctr"/>
             <a:r>
-              <a:rPr sz="1200" b="1">
+              <a:rPr sz="1200" b="1" dirty="0">
                 <a:solidFill>
                   <a:srgbClr val="FFFFFF"/>
                 </a:solidFill>
@@ -6269,12 +6269,28 @@
           <a:p>
             <a:pPr algn="l"/>
             <a:r>
-              <a:rPr sz="1200" b="0">
+              <a:rPr sz="1200" b="0" dirty="0">
                 <a:solidFill>
                   <a:srgbClr val="CBD5E1"/>
                 </a:solidFill>
               </a:rPr>
-              <a:t>▸ FastAPI 0.115 + Uvicorn (ASGI)</a:t>
+              <a:t>▸ FastAPI 0.115 + </a:t>
+            </a:r>
+            <a:r>
+              <a:rPr sz="1200" b="0" dirty="0" err="1">
+                <a:solidFill>
+                  <a:srgbClr val="CBD5E1"/>
+                </a:solidFill>
+              </a:rPr>
+              <a:t>Uvicorn</a:t>
+            </a:r>
+            <a:r>
+              <a:rPr sz="1200" b="0" dirty="0">
+                <a:solidFill>
+                  <a:srgbClr val="CBD5E1"/>
+                </a:solidFill>
+              </a:rPr>
+              <a:t> (ASGI)</a:t>
             </a:r>
           </a:p>
         </p:txBody>
@@ -7374,7 +7390,7 @@
           <a:p>
             <a:pPr algn="l"/>
             <a:r>
-              <a:rPr sz="2600" b="1">
+              <a:rPr sz="2600" b="1" dirty="0">
                 <a:solidFill>
                   <a:srgbClr val="FFFFFF"/>
                 </a:solidFill>
@@ -14362,12 +14378,20 @@
           <a:p>
             <a:pPr algn="l"/>
             <a:r>
-              <a:rPr sz="1100" b="0">
+              <a:rPr sz="1100" b="0" dirty="0" err="1">
                 <a:solidFill>
                   <a:srgbClr val="FFFFFF"/>
                 </a:solidFill>
               </a:rPr>
-              <a:t>AgentForge Backend (FastAPI)</a:t>
+              <a:t>AgentForge</a:t>
+            </a:r>
+            <a:r>
+              <a:rPr sz="1100" b="0" dirty="0">
+                <a:solidFill>
+                  <a:srgbClr val="FFFFFF"/>
+                </a:solidFill>
+              </a:rPr>
+              <a:t> Backend (FastAPI)</a:t>
             </a:r>
           </a:p>
         </p:txBody>
@@ -16403,12 +16427,44 @@
           <a:p>
             <a:pPr algn="l"/>
             <a:r>
-              <a:rPr sz="1100" b="0">
+              <a:rPr sz="1100" b="0" dirty="0">
                 <a:solidFill>
                   <a:srgbClr val="CBD5E1"/>
                 </a:solidFill>
               </a:rPr>
-              <a:t>Complete React + FastAPI project using /api/chat + /api/documents routes → proxy target port 8001</a:t>
+              <a:t>Complete React + FastAPI project using /</a:t>
+            </a:r>
+            <a:r>
+              <a:rPr sz="1100" b="0" dirty="0" err="1">
+                <a:solidFill>
+                  <a:srgbClr val="CBD5E1"/>
+                </a:solidFill>
+              </a:rPr>
+              <a:t>api</a:t>
+            </a:r>
+            <a:r>
+              <a:rPr sz="1100" b="0" dirty="0">
+                <a:solidFill>
+                  <a:srgbClr val="CBD5E1"/>
+                </a:solidFill>
+              </a:rPr>
+              <a:t>/chat + /</a:t>
+            </a:r>
+            <a:r>
+              <a:rPr sz="1100" b="0" dirty="0" err="1">
+                <a:solidFill>
+                  <a:srgbClr val="CBD5E1"/>
+                </a:solidFill>
+              </a:rPr>
+              <a:t>api</a:t>
+            </a:r>
+            <a:r>
+              <a:rPr sz="1100" b="0" dirty="0">
+                <a:solidFill>
+                  <a:srgbClr val="CBD5E1"/>
+                </a:solidFill>
+              </a:rPr>
+              <a:t>/documents routes → proxy target port 8001</a:t>
             </a:r>
           </a:p>
         </p:txBody>
@@ -30126,7 +30182,7 @@
           <a:p>
             <a:pPr algn="l"/>
             <a:r>
-              <a:rPr sz="1300" b="0">
+              <a:rPr sz="1300" b="0" dirty="0">
                 <a:solidFill>
                   <a:srgbClr val="CBD5E1"/>
                 </a:solidFill>
@@ -30238,7 +30294,7 @@
           <a:p>
             <a:pPr algn="l"/>
             <a:r>
-              <a:rPr sz="1100" b="0">
+              <a:rPr sz="1100" b="0" dirty="0">
                 <a:solidFill>
                   <a:srgbClr val="CBD5E1"/>
                 </a:solidFill>
@@ -30301,28 +30357,41 @@
         <p:spPr>
           <a:xfrm>
             <a:off x="594360" y="2450592"/>
-            <a:ext cx="10972800" cy="365760"/>
-          </a:xfrm>
-          <a:prstGeom prst="rect">
-            <a:avLst/>
-          </a:prstGeom>
-          <a:noFill/>
-        </p:spPr>
-        <p:txBody>
-          <a:bodyPr wrap="square">
-            <a:spAutoFit/>
-          </a:bodyPr>
-          <a:lstStyle/>
-          <a:p>
-            <a:pPr algn="l"/>
-            <a:r>
-              <a:rPr sz="1400" b="1">
+            <a:ext cx="10972800" cy="307777"/>
+          </a:xfrm>
+          <a:prstGeom prst="rect">
+            <a:avLst/>
+          </a:prstGeom>
+          <a:noFill/>
+        </p:spPr>
+        <p:txBody>
+          <a:bodyPr wrap="square">
+            <a:spAutoFit/>
+          </a:bodyPr>
+          <a:lstStyle/>
+          <a:p>
+            <a:pPr algn="l"/>
+            <a:r>
+              <a:rPr sz="1400" b="1" dirty="0">
                 <a:solidFill>
                   <a:srgbClr val="606EF5"/>
                 </a:solidFill>
               </a:rPr>
               <a:t>1️⃣  Baseline Audit — 55/100</a:t>
             </a:r>
+            <a:r>
+              <a:rPr lang="en-US" sz="1400" b="1" dirty="0">
+                <a:solidFill>
+                  <a:srgbClr val="606EF5"/>
+                </a:solidFill>
+              </a:rPr>
+              <a:t> to 89/100</a:t>
+            </a:r>
+            <a:endParaRPr sz="1400" b="1" dirty="0">
+              <a:solidFill>
+                <a:srgbClr val="606EF5"/>
+              </a:solidFill>
+            </a:endParaRPr>
           </a:p>
         </p:txBody>
       </p:sp>
@@ -30739,7 +30808,7 @@
 </file>
 
 <file path=ppt/slides/slide29.xml><?xml version="1.0" encoding="utf-8"?>
-<p:sld xmlns:a="http://schemas.openxmlformats.org/drawingml/2006/main" xmlns:p="http://schemas.openxmlformats.org/presentationml/2006/main" xmlns:r="http://schemas.openxmlformats.org/officeDocument/2006/relationships">
+<p:sld xmlns:a="http://schemas.openxmlformats.org/drawingml/2006/main" xmlns:r="http://schemas.openxmlformats.org/officeDocument/2006/relationships" xmlns:p="http://schemas.openxmlformats.org/presentationml/2006/main">
   <p:cSld>
     <p:spTree>
       <p:nvGrpSpPr>
@@ -30747,7 +30816,14 @@
         <p:cNvGrpSpPr/>
         <p:nvPr/>
       </p:nvGrpSpPr>
-      <p:grpSpPr/>
+      <p:grpSpPr>
+        <a:xfrm>
+          <a:off x="0" y="0"/>
+          <a:ext cx="0" cy="0"/>
+          <a:chOff x="0" y="0"/>
+          <a:chExt cx="0" cy="0"/>
+        </a:xfrm>
+      </p:grpSpPr>
       <p:sp>
         <p:nvSpPr>
           <p:cNvPr id="2" name="Rectangle 1"/>
@@ -30789,6 +30865,7 @@
           <a:lstStyle/>
           <a:p>
             <a:pPr algn="ctr"/>
+            <a:endParaRPr/>
           </a:p>
         </p:txBody>
       </p:sp>
@@ -30833,6 +30910,7 @@
           <a:lstStyle/>
           <a:p>
             <a:pPr algn="ctr"/>
+            <a:endParaRPr/>
           </a:p>
         </p:txBody>
       </p:sp>
@@ -30844,7 +30922,7 @@
         </p:nvSpPr>
         <p:spPr>
           <a:xfrm>
-            <a:off x="457200" y="274320"/>
+            <a:off x="457200" y="73152"/>
             <a:ext cx="10972800" cy="548640"/>
           </a:xfrm>
           <a:prstGeom prst="rect">
@@ -30859,7 +30937,7 @@
           <a:lstStyle/>
           <a:p>
             <a:r>
-              <a:rPr sz="2700" b="1">
+              <a:rPr sz="2700" b="1" dirty="0">
                 <a:solidFill>
                   <a:srgbClr val="FFFFFF"/>
                 </a:solidFill>
@@ -30877,7 +30955,7 @@
         </p:nvSpPr>
         <p:spPr>
           <a:xfrm>
-            <a:off x="457200" y="868680"/>
+            <a:off x="470852" y="475488"/>
             <a:ext cx="11247120" cy="548640"/>
           </a:xfrm>
           <a:prstGeom prst="rect">
@@ -30892,7 +30970,7 @@
           <a:lstStyle/>
           <a:p>
             <a:r>
-              <a:rPr sz="1300" b="0">
+              <a:rPr sz="1300" b="0" dirty="0">
                 <a:solidFill>
                   <a:srgbClr val="CBD5E1"/>
                 </a:solidFill>
@@ -30910,7 +30988,7 @@
         </p:nvSpPr>
         <p:spPr>
           <a:xfrm>
-            <a:off x="365760" y="960120"/>
+            <a:off x="365760" y="1042416"/>
             <a:ext cx="3703320" cy="2514600"/>
           </a:xfrm>
           <a:prstGeom prst="rect">
@@ -30943,6 +31021,7 @@
           <a:lstStyle/>
           <a:p>
             <a:pPr algn="ctr"/>
+            <a:endParaRPr/>
           </a:p>
         </p:txBody>
       </p:sp>
@@ -30954,7 +31033,7 @@
         </p:nvSpPr>
         <p:spPr>
           <a:xfrm>
-            <a:off x="502920" y="1069848"/>
+            <a:off x="502920" y="1152144"/>
             <a:ext cx="3429000" cy="411480"/>
           </a:xfrm>
           <a:prstGeom prst="rect">
@@ -30987,7 +31066,7 @@
         </p:nvSpPr>
         <p:spPr>
           <a:xfrm>
-            <a:off x="502920" y="1463040"/>
+            <a:off x="502920" y="1545336"/>
             <a:ext cx="1463040" cy="640080"/>
           </a:xfrm>
           <a:prstGeom prst="rect">
@@ -31020,7 +31099,7 @@
         </p:nvSpPr>
         <p:spPr>
           <a:xfrm>
-            <a:off x="502920" y="2039112"/>
+            <a:off x="502920" y="2121408"/>
             <a:ext cx="3474720" cy="320040"/>
           </a:xfrm>
           <a:prstGeom prst="rect">
@@ -31053,7 +31132,7 @@
         </p:nvSpPr>
         <p:spPr>
           <a:xfrm>
-            <a:off x="502920" y="2350008"/>
+            <a:off x="502920" y="2432304"/>
             <a:ext cx="3474720" cy="1051560"/>
           </a:xfrm>
           <a:prstGeom prst="rect">
@@ -31086,7 +31165,7 @@
         </p:nvSpPr>
         <p:spPr>
           <a:xfrm>
-            <a:off x="4297680" y="960120"/>
+            <a:off x="4297680" y="1042416"/>
             <a:ext cx="3703320" cy="2514600"/>
           </a:xfrm>
           <a:prstGeom prst="rect">
@@ -31119,6 +31198,7 @@
           <a:lstStyle/>
           <a:p>
             <a:pPr algn="ctr"/>
+            <a:endParaRPr/>
           </a:p>
         </p:txBody>
       </p:sp>
@@ -31130,7 +31210,7 @@
         </p:nvSpPr>
         <p:spPr>
           <a:xfrm>
-            <a:off x="4434840" y="1069848"/>
+            <a:off x="4434840" y="1152144"/>
             <a:ext cx="3429000" cy="411480"/>
           </a:xfrm>
           <a:prstGeom prst="rect">
@@ -31163,7 +31243,7 @@
         </p:nvSpPr>
         <p:spPr>
           <a:xfrm>
-            <a:off x="4434840" y="1463040"/>
+            <a:off x="4434840" y="1545336"/>
             <a:ext cx="1463040" cy="640080"/>
           </a:xfrm>
           <a:prstGeom prst="rect">
@@ -31196,7 +31276,7 @@
         </p:nvSpPr>
         <p:spPr>
           <a:xfrm>
-            <a:off x="4434840" y="2039112"/>
+            <a:off x="4434840" y="2121408"/>
             <a:ext cx="3474720" cy="320040"/>
           </a:xfrm>
           <a:prstGeom prst="rect">
@@ -31229,7 +31309,7 @@
         </p:nvSpPr>
         <p:spPr>
           <a:xfrm>
-            <a:off x="4434840" y="2350008"/>
+            <a:off x="4434840" y="2432304"/>
             <a:ext cx="3474720" cy="1051560"/>
           </a:xfrm>
           <a:prstGeom prst="rect">
@@ -31262,7 +31342,7 @@
         </p:nvSpPr>
         <p:spPr>
           <a:xfrm>
-            <a:off x="8229600" y="960120"/>
+            <a:off x="8229600" y="1042416"/>
             <a:ext cx="3703320" cy="2514600"/>
           </a:xfrm>
           <a:prstGeom prst="rect">
@@ -31295,6 +31375,7 @@
           <a:lstStyle/>
           <a:p>
             <a:pPr algn="ctr"/>
+            <a:endParaRPr/>
           </a:p>
         </p:txBody>
       </p:sp>
@@ -31306,7 +31387,7 @@
         </p:nvSpPr>
         <p:spPr>
           <a:xfrm>
-            <a:off x="8366760" y="1069848"/>
+            <a:off x="8366760" y="1152144"/>
             <a:ext cx="3429000" cy="411480"/>
           </a:xfrm>
           <a:prstGeom prst="rect">
@@ -31339,7 +31420,7 @@
         </p:nvSpPr>
         <p:spPr>
           <a:xfrm>
-            <a:off x="8366760" y="1463040"/>
+            <a:off x="8366760" y="1545336"/>
             <a:ext cx="1463040" cy="640080"/>
           </a:xfrm>
           <a:prstGeom prst="rect">
@@ -31372,7 +31453,7 @@
         </p:nvSpPr>
         <p:spPr>
           <a:xfrm>
-            <a:off x="8366760" y="2039112"/>
+            <a:off x="8366760" y="2121408"/>
             <a:ext cx="3474720" cy="320040"/>
           </a:xfrm>
           <a:prstGeom prst="rect">
@@ -31405,7 +31486,7 @@
         </p:nvSpPr>
         <p:spPr>
           <a:xfrm>
-            <a:off x="8366760" y="2350008"/>
+            <a:off x="8366760" y="2432304"/>
             <a:ext cx="3474720" cy="1051560"/>
           </a:xfrm>
           <a:prstGeom prst="rect">
@@ -31438,7 +31519,7 @@
         </p:nvSpPr>
         <p:spPr>
           <a:xfrm>
-            <a:off x="365760" y="3657600"/>
+            <a:off x="365760" y="3739896"/>
             <a:ext cx="3703320" cy="2514600"/>
           </a:xfrm>
           <a:prstGeom prst="rect">
@@ -31471,6 +31552,7 @@
           <a:lstStyle/>
           <a:p>
             <a:pPr algn="ctr"/>
+            <a:endParaRPr/>
           </a:p>
         </p:txBody>
       </p:sp>
@@ -31482,7 +31564,7 @@
         </p:nvSpPr>
         <p:spPr>
           <a:xfrm>
-            <a:off x="502920" y="3767328"/>
+            <a:off x="502920" y="3849624"/>
             <a:ext cx="3429000" cy="411480"/>
           </a:xfrm>
           <a:prstGeom prst="rect">
@@ -31515,7 +31597,7 @@
         </p:nvSpPr>
         <p:spPr>
           <a:xfrm>
-            <a:off x="502920" y="4160520"/>
+            <a:off x="502920" y="4242816"/>
             <a:ext cx="1463040" cy="640080"/>
           </a:xfrm>
           <a:prstGeom prst="rect">
@@ -31548,7 +31630,7 @@
         </p:nvSpPr>
         <p:spPr>
           <a:xfrm>
-            <a:off x="502920" y="4736592"/>
+            <a:off x="502920" y="4818888"/>
             <a:ext cx="3474720" cy="320040"/>
           </a:xfrm>
           <a:prstGeom prst="rect">
@@ -31581,7 +31663,7 @@
         </p:nvSpPr>
         <p:spPr>
           <a:xfrm>
-            <a:off x="502920" y="5047488"/>
+            <a:off x="502920" y="5129784"/>
             <a:ext cx="3474720" cy="1051560"/>
           </a:xfrm>
           <a:prstGeom prst="rect">
@@ -31614,7 +31696,7 @@
         </p:nvSpPr>
         <p:spPr>
           <a:xfrm>
-            <a:off x="4297680" y="3657600"/>
+            <a:off x="4297680" y="3739896"/>
             <a:ext cx="3703320" cy="2514600"/>
           </a:xfrm>
           <a:prstGeom prst="rect">
@@ -31647,6 +31729,7 @@
           <a:lstStyle/>
           <a:p>
             <a:pPr algn="ctr"/>
+            <a:endParaRPr/>
           </a:p>
         </p:txBody>
       </p:sp>
@@ -31658,7 +31741,7 @@
         </p:nvSpPr>
         <p:spPr>
           <a:xfrm>
-            <a:off x="4434840" y="3767328"/>
+            <a:off x="4434840" y="3849624"/>
             <a:ext cx="3429000" cy="411480"/>
           </a:xfrm>
           <a:prstGeom prst="rect">
@@ -31691,7 +31774,7 @@
         </p:nvSpPr>
         <p:spPr>
           <a:xfrm>
-            <a:off x="4434840" y="4160520"/>
+            <a:off x="4434840" y="4242816"/>
             <a:ext cx="1463040" cy="640080"/>
           </a:xfrm>
           <a:prstGeom prst="rect">
@@ -31724,7 +31807,7 @@
         </p:nvSpPr>
         <p:spPr>
           <a:xfrm>
-            <a:off x="4434840" y="4736592"/>
+            <a:off x="4434840" y="4818888"/>
             <a:ext cx="3474720" cy="320040"/>
           </a:xfrm>
           <a:prstGeom prst="rect">
@@ -31757,7 +31840,7 @@
         </p:nvSpPr>
         <p:spPr>
           <a:xfrm>
-            <a:off x="4434840" y="5047488"/>
+            <a:off x="4434840" y="5129784"/>
             <a:ext cx="3474720" cy="1051560"/>
           </a:xfrm>
           <a:prstGeom prst="rect">
@@ -31790,7 +31873,7 @@
         </p:nvSpPr>
         <p:spPr>
           <a:xfrm>
-            <a:off x="8229600" y="3657600"/>
+            <a:off x="8229600" y="3739896"/>
             <a:ext cx="3703320" cy="2514600"/>
           </a:xfrm>
           <a:prstGeom prst="rect">
@@ -31823,6 +31906,7 @@
           <a:lstStyle/>
           <a:p>
             <a:pPr algn="ctr"/>
+            <a:endParaRPr/>
           </a:p>
         </p:txBody>
       </p:sp>
@@ -31834,7 +31918,7 @@
         </p:nvSpPr>
         <p:spPr>
           <a:xfrm>
-            <a:off x="8366760" y="3767328"/>
+            <a:off x="8366760" y="3849624"/>
             <a:ext cx="3429000" cy="411480"/>
           </a:xfrm>
           <a:prstGeom prst="rect">
@@ -31867,7 +31951,7 @@
         </p:nvSpPr>
         <p:spPr>
           <a:xfrm>
-            <a:off x="8366760" y="4160520"/>
+            <a:off x="8366760" y="4242816"/>
             <a:ext cx="1463040" cy="640080"/>
           </a:xfrm>
           <a:prstGeom prst="rect">
@@ -31900,7 +31984,7 @@
         </p:nvSpPr>
         <p:spPr>
           <a:xfrm>
-            <a:off x="8366760" y="4736592"/>
+            <a:off x="8366760" y="4818888"/>
             <a:ext cx="3474720" cy="320040"/>
           </a:xfrm>
           <a:prstGeom prst="rect">
@@ -31933,7 +32017,7 @@
         </p:nvSpPr>
         <p:spPr>
           <a:xfrm>
-            <a:off x="8366760" y="5047488"/>
+            <a:off x="8366760" y="5129784"/>
             <a:ext cx="3474720" cy="1051560"/>
           </a:xfrm>
           <a:prstGeom prst="rect">
@@ -32853,7 +32937,7 @@
 </file>
 
 <file path=ppt/slides/slide30.xml><?xml version="1.0" encoding="utf-8"?>
-<p:sld xmlns:a="http://schemas.openxmlformats.org/drawingml/2006/main" xmlns:p="http://schemas.openxmlformats.org/presentationml/2006/main" xmlns:r="http://schemas.openxmlformats.org/officeDocument/2006/relationships">
+<p:sld xmlns:a="http://schemas.openxmlformats.org/drawingml/2006/main" xmlns:r="http://schemas.openxmlformats.org/officeDocument/2006/relationships" xmlns:p="http://schemas.openxmlformats.org/presentationml/2006/main">
   <p:cSld>
     <p:spTree>
       <p:nvGrpSpPr>
@@ -32861,7 +32945,14 @@
         <p:cNvGrpSpPr/>
         <p:nvPr/>
       </p:nvGrpSpPr>
-      <p:grpSpPr/>
+      <p:grpSpPr>
+        <a:xfrm>
+          <a:off x="0" y="0"/>
+          <a:ext cx="0" cy="0"/>
+          <a:chOff x="0" y="0"/>
+          <a:chExt cx="0" cy="0"/>
+        </a:xfrm>
+      </p:grpSpPr>
       <p:sp>
         <p:nvSpPr>
           <p:cNvPr id="2" name="Rectangle 1"/>
@@ -32903,6 +32994,7 @@
           <a:lstStyle/>
           <a:p>
             <a:pPr algn="ctr"/>
+            <a:endParaRPr/>
           </a:p>
         </p:txBody>
       </p:sp>
@@ -32947,6 +33039,7 @@
           <a:lstStyle/>
           <a:p>
             <a:pPr algn="ctr"/>
+            <a:endParaRPr/>
           </a:p>
         </p:txBody>
       </p:sp>
@@ -33057,6 +33150,7 @@
           <a:lstStyle/>
           <a:p>
             <a:pPr algn="ctr"/>
+            <a:endParaRPr/>
           </a:p>
         </p:txBody>
       </p:sp>
@@ -33116,7 +33210,7 @@
           <a:lstStyle/>
           <a:p>
             <a:r>
-              <a:rPr sz="1150" b="0">
+              <a:rPr sz="1150" b="0" dirty="0">
                 <a:solidFill>
                   <a:srgbClr val="CBD5E1"/>
                 </a:solidFill>
@@ -33167,6 +33261,7 @@
           <a:lstStyle/>
           <a:p>
             <a:pPr algn="ctr"/>
+            <a:endParaRPr/>
           </a:p>
         </p:txBody>
       </p:sp>
@@ -33179,7 +33274,7 @@
         <p:spPr>
           <a:xfrm>
             <a:off x="594360" y="2450592"/>
-            <a:ext cx="10972800" cy="365760"/>
+            <a:ext cx="2667718" cy="338554"/>
           </a:xfrm>
           <a:prstGeom prst="rect">
             <a:avLst/>
@@ -33193,13 +33288,26 @@
           <a:lstStyle/>
           <a:p>
             <a:r>
+              <a:rPr sz="1600" b="1" dirty="0">
+                <a:solidFill>
+                  <a:srgbClr val="FFFFFF"/>
+                </a:solidFill>
+              </a:rPr>
+              <a:t>1️⃣  Baseline Audit </a:t>
+            </a:r>
+            <a:r>
               <a:rPr sz="1600" b="1">
                 <a:solidFill>
                   <a:srgbClr val="FFFFFF"/>
                 </a:solidFill>
               </a:rPr>
-              <a:t>1️⃣  Baseline Audit — 78/100</a:t>
-            </a:r>
+              <a:t>— 78/100</a:t>
+            </a:r>
+            <a:endParaRPr sz="1600" b="1" dirty="0">
+              <a:solidFill>
+                <a:srgbClr val="FFFFFF"/>
+              </a:solidFill>
+            </a:endParaRPr>
           </a:p>
         </p:txBody>
       </p:sp>
@@ -33226,7 +33334,7 @@
           <a:lstStyle/>
           <a:p>
             <a:r>
-              <a:rPr sz="1150" b="0">
+              <a:rPr sz="1150" b="0" dirty="0">
                 <a:solidFill>
                   <a:srgbClr val="CBD5E1"/>
                 </a:solidFill>
@@ -33277,6 +33385,7 @@
           <a:lstStyle/>
           <a:p>
             <a:pPr algn="ctr"/>
+            <a:endParaRPr/>
           </a:p>
         </p:txBody>
       </p:sp>
@@ -33387,6 +33496,7 @@
           <a:lstStyle/>
           <a:p>
             <a:pPr algn="ctr"/>
+            <a:endParaRPr/>
           </a:p>
         </p:txBody>
       </p:sp>
@@ -33497,6 +33607,7 @@
           <a:lstStyle/>
           <a:p>
             <a:pPr algn="ctr"/>
+            <a:endParaRPr/>
           </a:p>
         </p:txBody>
       </p:sp>
@@ -33608,7 +33719,7 @@
 </file>
 
 <file path=ppt/slides/slide31.xml><?xml version="1.0" encoding="utf-8"?>
-<p:sld xmlns:a="http://schemas.openxmlformats.org/drawingml/2006/main" xmlns:p="http://schemas.openxmlformats.org/presentationml/2006/main" xmlns:r="http://schemas.openxmlformats.org/officeDocument/2006/relationships">
+<p:sld xmlns:a="http://schemas.openxmlformats.org/drawingml/2006/main" xmlns:r="http://schemas.openxmlformats.org/officeDocument/2006/relationships" xmlns:p="http://schemas.openxmlformats.org/presentationml/2006/main">
   <p:cSld>
     <p:spTree>
       <p:nvGrpSpPr>
@@ -33616,7 +33727,14 @@
         <p:cNvGrpSpPr/>
         <p:nvPr/>
       </p:nvGrpSpPr>
-      <p:grpSpPr/>
+      <p:grpSpPr>
+        <a:xfrm>
+          <a:off x="0" y="0"/>
+          <a:ext cx="0" cy="0"/>
+          <a:chOff x="0" y="0"/>
+          <a:chExt cx="0" cy="0"/>
+        </a:xfrm>
+      </p:grpSpPr>
       <p:sp>
         <p:nvSpPr>
           <p:cNvPr id="2" name="Rectangle 1"/>
@@ -33658,6 +33776,7 @@
           <a:lstStyle/>
           <a:p>
             <a:pPr algn="ctr"/>
+            <a:endParaRPr/>
           </a:p>
         </p:txBody>
       </p:sp>
@@ -33702,6 +33821,7 @@
           <a:lstStyle/>
           <a:p>
             <a:pPr algn="ctr"/>
+            <a:endParaRPr/>
           </a:p>
         </p:txBody>
       </p:sp>
@@ -33812,6 +33932,7 @@
           <a:lstStyle/>
           <a:p>
             <a:pPr algn="ctr"/>
+            <a:endParaRPr/>
           </a:p>
         </p:txBody>
       </p:sp>
@@ -33922,6 +34043,7 @@
           <a:lstStyle/>
           <a:p>
             <a:pPr algn="ctr"/>
+            <a:endParaRPr/>
           </a:p>
         </p:txBody>
       </p:sp>
@@ -34032,6 +34154,7 @@
           <a:lstStyle/>
           <a:p>
             <a:pPr algn="ctr"/>
+            <a:endParaRPr/>
           </a:p>
         </p:txBody>
       </p:sp>
@@ -34142,6 +34265,7 @@
           <a:lstStyle/>
           <a:p>
             <a:pPr algn="ctr"/>
+            <a:endParaRPr/>
           </a:p>
         </p:txBody>
       </p:sp>
@@ -34252,6 +34376,7 @@
           <a:lstStyle/>
           <a:p>
             <a:pPr algn="ctr"/>
+            <a:endParaRPr/>
           </a:p>
         </p:txBody>
       </p:sp>
@@ -37058,12 +37183,28 @@
           <a:p>
             <a:pPr algn="l"/>
             <a:r>
-              <a:rPr sz="1300" b="1">
+              <a:rPr sz="1300" b="1" dirty="0">
                 <a:solidFill>
                   <a:srgbClr val="7C3AED"/>
                 </a:solidFill>
               </a:rPr>
-              <a:t>API GATEWAY  (FastAPI 0.115 · JWT/RBAC · OpenTelemetry)</a:t>
+              <a:t>API GATEWAY  (FastAPI 0.115 · JWT/RBAC · </a:t>
+            </a:r>
+            <a:r>
+              <a:rPr sz="1300" b="1" dirty="0" err="1">
+                <a:solidFill>
+                  <a:srgbClr val="7C3AED"/>
+                </a:solidFill>
+              </a:rPr>
+              <a:t>OpenTelemetry</a:t>
+            </a:r>
+            <a:r>
+              <a:rPr sz="1300" b="1" dirty="0">
+                <a:solidFill>
+                  <a:srgbClr val="7C3AED"/>
+                </a:solidFill>
+              </a:rPr>
+              <a:t>)</a:t>
             </a:r>
           </a:p>
         </p:txBody>
@@ -39714,7 +39855,7 @@
           <a:p>
             <a:pPr algn="l"/>
             <a:r>
-              <a:rPr sz="1200" b="0">
+              <a:rPr sz="1200" b="0" dirty="0">
                 <a:solidFill>
                   <a:srgbClr val="CBD5E1"/>
                 </a:solidFill>

--- a/docs/AgentForge-PresentationV9.pptx
+++ b/docs/AgentForge-PresentationV9.pptx
@@ -36,6 +36,9 @@
     <p:sldId id="293" r:id="rId30"/>
     <p:sldId id="294" r:id="rId31"/>
     <p:sldId id="295" r:id="rId32"/>
+    <p:sldId id="296" r:id="rId46"/>
+    <p:sldId id="297" r:id="rId47"/>
+    <p:sldId id="298" r:id="rId48"/>
     <p:sldId id="285" r:id="rId33"/>
     <p:sldId id="286" r:id="rId34"/>
     <p:sldId id="287" r:id="rId35"/>
@@ -19005,7 +19008,7 @@
                   <a:srgbClr val="CBD5E1"/>
                 </a:solidFill>
               </a:rPr>
-              <a:t>▸ Multi-agent orchestrator</a:t>
+              <a:t>▸ Multi-agent orchestrator (Manager Agents wired end-to-end this cycle)</a:t>
             </a:r>
           </a:p>
         </p:txBody>
@@ -34488,7 +34491,7 @@
 </file>
 
 <file path=ppt/slides/slide32.xml><?xml version="1.0" encoding="utf-8"?>
-<p:sld xmlns:a="http://schemas.openxmlformats.org/drawingml/2006/main" xmlns:r="http://schemas.openxmlformats.org/officeDocument/2006/relationships" xmlns:p="http://schemas.openxmlformats.org/presentationml/2006/main">
+<p:sld xmlns:a="http://schemas.openxmlformats.org/drawingml/2006/main" xmlns:p="http://schemas.openxmlformats.org/presentationml/2006/main" xmlns:r="http://schemas.openxmlformats.org/officeDocument/2006/relationships">
   <p:cSld>
     <p:spTree>
       <p:nvGrpSpPr>
@@ -34496,14 +34499,7 @@
         <p:cNvGrpSpPr/>
         <p:nvPr/>
       </p:nvGrpSpPr>
-      <p:grpSpPr>
-        <a:xfrm>
-          <a:off x="0" y="0"/>
-          <a:ext cx="0" cy="0"/>
-          <a:chOff x="0" y="0"/>
-          <a:chExt cx="0" cy="0"/>
-        </a:xfrm>
-      </p:grpSpPr>
+      <p:grpSpPr/>
       <p:sp>
         <p:nvSpPr>
           <p:cNvPr id="2" name="Rectangle 1"/>
@@ -34513,7 +34509,7 @@
         <p:spPr>
           <a:xfrm>
             <a:off x="0" y="0"/>
-            <a:ext cx="12188825" cy="6858000"/>
+            <a:ext cx="12188952" cy="6858000"/>
           </a:xfrm>
           <a:prstGeom prst="rect">
             <a:avLst/>
@@ -34545,7 +34541,6 @@
           <a:lstStyle/>
           <a:p>
             <a:pPr algn="ctr"/>
-            <a:endParaRPr/>
           </a:p>
         </p:txBody>
       </p:sp>
@@ -34558,7 +34553,7 @@
         <p:spPr>
           <a:xfrm>
             <a:off x="0" y="73152"/>
-            <a:ext cx="12188825" cy="45720"/>
+            <a:ext cx="12188952" cy="45720"/>
           </a:xfrm>
           <a:prstGeom prst="rect">
             <a:avLst/>
@@ -34590,7 +34585,6 @@
           <a:lstStyle/>
           <a:p>
             <a:pPr algn="ctr"/>
-            <a:endParaRPr/>
           </a:p>
         </p:txBody>
       </p:sp>
@@ -34617,12 +34611,12 @@
           <a:lstStyle/>
           <a:p>
             <a:r>
-              <a:rPr sz="2600" b="1">
+              <a:rPr sz="2700" b="1">
                 <a:solidFill>
                   <a:srgbClr val="FFFFFF"/>
                 </a:solidFill>
               </a:rPr>
-              <a:t>How To Use: Visual Builder — Templates &amp; Auto-Build</a:t>
+              <a:t>Manager/Orchestrator Agents — New Feature Deep Dive</a:t>
             </a:r>
           </a:p>
         </p:txBody>
@@ -34635,7 +34629,590 @@
         </p:nvSpPr>
         <p:spPr>
           <a:xfrm>
-            <a:off x="11731752" y="6492240"/>
+            <a:off x="457200" y="868680"/>
+            <a:ext cx="11247120" cy="548640"/>
+          </a:xfrm>
+          <a:prstGeom prst="rect">
+            <a:avLst/>
+          </a:prstGeom>
+          <a:noFill/>
+        </p:spPr>
+        <p:txBody>
+          <a:bodyPr wrap="square">
+            <a:spAutoFit/>
+          </a:bodyPr>
+          <a:lstStyle/>
+          <a:p>
+            <a:r>
+              <a:rPr sz="1300" b="0">
+                <a:solidFill>
+                  <a:srgbClr val="CBD5E1"/>
+                </a:solidFill>
+              </a:rPr>
+              <a:t>Closes the #1 Lyzr-parity gap identified in this cycle's competitive test pass: dynamic goal decomposition and delegation, not just a fixed pre-drawn workflow.</a:t>
+            </a:r>
+          </a:p>
+        </p:txBody>
+      </p:sp>
+      <p:sp>
+        <p:nvSpPr>
+          <p:cNvPr id="6" name="Rectangle 5"/>
+          <p:cNvSpPr/>
+          <p:nvPr/>
+        </p:nvSpPr>
+        <p:spPr>
+          <a:xfrm>
+            <a:off x="365760" y="1536192"/>
+            <a:ext cx="73152" cy="777240"/>
+          </a:xfrm>
+          <a:prstGeom prst="rect">
+            <a:avLst/>
+          </a:prstGeom>
+          <a:solidFill>
+            <a:srgbClr val="606EF5"/>
+          </a:solidFill>
+          <a:ln>
+            <a:noFill/>
+          </a:ln>
+          <a:effectLst/>
+        </p:spPr>
+        <p:style>
+          <a:lnRef idx="1">
+            <a:schemeClr val="accent1"/>
+          </a:lnRef>
+          <a:fillRef idx="3">
+            <a:schemeClr val="accent1"/>
+          </a:fillRef>
+          <a:effectRef idx="2">
+            <a:schemeClr val="accent1"/>
+          </a:effectRef>
+          <a:fontRef idx="minor">
+            <a:schemeClr val="lt1"/>
+          </a:fontRef>
+        </p:style>
+        <p:txBody>
+          <a:bodyPr rtlCol="0" anchor="ctr"/>
+          <a:lstStyle/>
+          <a:p>
+            <a:pPr algn="ctr"/>
+          </a:p>
+        </p:txBody>
+      </p:sp>
+      <p:sp>
+        <p:nvSpPr>
+          <p:cNvPr id="7" name="TextBox 6"/>
+          <p:cNvSpPr txBox="1"/>
+          <p:nvPr/>
+        </p:nvSpPr>
+        <p:spPr>
+          <a:xfrm>
+            <a:off x="594360" y="1554480"/>
+            <a:ext cx="10972800" cy="365760"/>
+          </a:xfrm>
+          <a:prstGeom prst="rect">
+            <a:avLst/>
+          </a:prstGeom>
+          <a:noFill/>
+        </p:spPr>
+        <p:txBody>
+          <a:bodyPr wrap="none">
+            <a:spAutoFit/>
+          </a:bodyPr>
+          <a:lstStyle/>
+          <a:p>
+            <a:r>
+              <a:rPr sz="1600" b="1">
+                <a:solidFill>
+                  <a:srgbClr val="FFFFFF"/>
+                </a:solidFill>
+              </a:rPr>
+              <a:t>🧩  What Was Already Half-Built</a:t>
+            </a:r>
+          </a:p>
+        </p:txBody>
+      </p:sp>
+      <p:sp>
+        <p:nvSpPr>
+          <p:cNvPr id="8" name="TextBox 7"/>
+          <p:cNvSpPr txBox="1"/>
+          <p:nvPr/>
+        </p:nvSpPr>
+        <p:spPr>
+          <a:xfrm>
+            <a:off x="594360" y="1920240"/>
+            <a:ext cx="11064240" cy="457200"/>
+          </a:xfrm>
+          <a:prstGeom prst="rect">
+            <a:avLst/>
+          </a:prstGeom>
+          <a:noFill/>
+        </p:spPr>
+        <p:txBody>
+          <a:bodyPr wrap="square">
+            <a:spAutoFit/>
+          </a:bodyPr>
+          <a:lstStyle/>
+          <a:p>
+            <a:r>
+              <a:rPr sz="1150" b="0">
+                <a:solidFill>
+                  <a:srgbClr val="CBD5E1"/>
+                </a:solidFill>
+              </a:rPr>
+              <a:t>MultiAgentOrchestrator (manager LLM picks which workers to invoke, in what order) already existed in the codebase — but was never wired into any API endpoint. A "Managerial Agent" UI stub in Agent Studio existed too, but only stored free text, never persisted to the backend.</a:t>
+            </a:r>
+          </a:p>
+        </p:txBody>
+      </p:sp>
+      <p:sp>
+        <p:nvSpPr>
+          <p:cNvPr id="9" name="Rectangle 8"/>
+          <p:cNvSpPr/>
+          <p:nvPr/>
+        </p:nvSpPr>
+        <p:spPr>
+          <a:xfrm>
+            <a:off x="365760" y="2432304"/>
+            <a:ext cx="73152" cy="777240"/>
+          </a:xfrm>
+          <a:prstGeom prst="rect">
+            <a:avLst/>
+          </a:prstGeom>
+          <a:solidFill>
+            <a:srgbClr val="10B981"/>
+          </a:solidFill>
+          <a:ln>
+            <a:noFill/>
+          </a:ln>
+          <a:effectLst/>
+        </p:spPr>
+        <p:style>
+          <a:lnRef idx="1">
+            <a:schemeClr val="accent1"/>
+          </a:lnRef>
+          <a:fillRef idx="3">
+            <a:schemeClr val="accent1"/>
+          </a:fillRef>
+          <a:effectRef idx="2">
+            <a:schemeClr val="accent1"/>
+          </a:effectRef>
+          <a:fontRef idx="minor">
+            <a:schemeClr val="lt1"/>
+          </a:fontRef>
+        </p:style>
+        <p:txBody>
+          <a:bodyPr rtlCol="0" anchor="ctr"/>
+          <a:lstStyle/>
+          <a:p>
+            <a:pPr algn="ctr"/>
+          </a:p>
+        </p:txBody>
+      </p:sp>
+      <p:sp>
+        <p:nvSpPr>
+          <p:cNvPr id="10" name="TextBox 9"/>
+          <p:cNvSpPr txBox="1"/>
+          <p:nvPr/>
+        </p:nvSpPr>
+        <p:spPr>
+          <a:xfrm>
+            <a:off x="594360" y="2450592"/>
+            <a:ext cx="10972800" cy="365760"/>
+          </a:xfrm>
+          <a:prstGeom prst="rect">
+            <a:avLst/>
+          </a:prstGeom>
+          <a:noFill/>
+        </p:spPr>
+        <p:txBody>
+          <a:bodyPr wrap="none">
+            <a:spAutoFit/>
+          </a:bodyPr>
+          <a:lstStyle/>
+          <a:p>
+            <a:r>
+              <a:rPr sz="1600" b="1">
+                <a:solidFill>
+                  <a:srgbClr val="FFFFFF"/>
+                </a:solidFill>
+              </a:rPr>
+              <a:t>🔗  What We Built — Wiring, Not Reinventing</a:t>
+            </a:r>
+          </a:p>
+        </p:txBody>
+      </p:sp>
+      <p:sp>
+        <p:nvSpPr>
+          <p:cNvPr id="11" name="TextBox 10"/>
+          <p:cNvSpPr txBox="1"/>
+          <p:nvPr/>
+        </p:nvSpPr>
+        <p:spPr>
+          <a:xfrm>
+            <a:off x="594360" y="2816352"/>
+            <a:ext cx="11064240" cy="457200"/>
+          </a:xfrm>
+          <a:prstGeom prst="rect">
+            <a:avLst/>
+          </a:prstGeom>
+          <a:noFill/>
+        </p:spPr>
+        <p:txBody>
+          <a:bodyPr wrap="square">
+            <a:spAutoFit/>
+          </a:bodyPr>
+          <a:lstStyle/>
+          <a:p>
+            <a:r>
+              <a:rPr sz="1150" b="0">
+                <a:solidFill>
+                  <a:srgbClr val="CBD5E1"/>
+                </a:solidFill>
+              </a:rPr>
+              <a:t>Added a worker_agent_ids column + migration, extended the agent run endpoint to branch on agent_type, and replaced the free-text picker with a real dropdown over existing agents. The manager LLM now dynamically selects a subset and order of real workers at runtime.</a:t>
+            </a:r>
+          </a:p>
+        </p:txBody>
+      </p:sp>
+      <p:sp>
+        <p:nvSpPr>
+          <p:cNvPr id="12" name="Rectangle 11"/>
+          <p:cNvSpPr/>
+          <p:nvPr/>
+        </p:nvSpPr>
+        <p:spPr>
+          <a:xfrm>
+            <a:off x="365760" y="3328415"/>
+            <a:ext cx="73152" cy="777240"/>
+          </a:xfrm>
+          <a:prstGeom prst="rect">
+            <a:avLst/>
+          </a:prstGeom>
+          <a:solidFill>
+            <a:srgbClr val="DC2626"/>
+          </a:solidFill>
+          <a:ln>
+            <a:noFill/>
+          </a:ln>
+          <a:effectLst/>
+        </p:spPr>
+        <p:style>
+          <a:lnRef idx="1">
+            <a:schemeClr val="accent1"/>
+          </a:lnRef>
+          <a:fillRef idx="3">
+            <a:schemeClr val="accent1"/>
+          </a:fillRef>
+          <a:effectRef idx="2">
+            <a:schemeClr val="accent1"/>
+          </a:effectRef>
+          <a:fontRef idx="minor">
+            <a:schemeClr val="lt1"/>
+          </a:fontRef>
+        </p:style>
+        <p:txBody>
+          <a:bodyPr rtlCol="0" anchor="ctr"/>
+          <a:lstStyle/>
+          <a:p>
+            <a:pPr algn="ctr"/>
+          </a:p>
+        </p:txBody>
+      </p:sp>
+      <p:sp>
+        <p:nvSpPr>
+          <p:cNvPr id="13" name="TextBox 12"/>
+          <p:cNvSpPr txBox="1"/>
+          <p:nvPr/>
+        </p:nvSpPr>
+        <p:spPr>
+          <a:xfrm>
+            <a:off x="594360" y="3346703"/>
+            <a:ext cx="10972800" cy="365760"/>
+          </a:xfrm>
+          <a:prstGeom prst="rect">
+            <a:avLst/>
+          </a:prstGeom>
+          <a:noFill/>
+        </p:spPr>
+        <p:txBody>
+          <a:bodyPr wrap="none">
+            <a:spAutoFit/>
+          </a:bodyPr>
+          <a:lstStyle/>
+          <a:p>
+            <a:r>
+              <a:rPr sz="1600" b="1">
+                <a:solidFill>
+                  <a:srgbClr val="FFFFFF"/>
+                </a:solidFill>
+              </a:rPr>
+              <a:t>🛡️  Safety Hardening Found In Review</a:t>
+            </a:r>
+          </a:p>
+        </p:txBody>
+      </p:sp>
+      <p:sp>
+        <p:nvSpPr>
+          <p:cNvPr id="14" name="TextBox 13"/>
+          <p:cNvSpPr txBox="1"/>
+          <p:nvPr/>
+        </p:nvSpPr>
+        <p:spPr>
+          <a:xfrm>
+            <a:off x="594360" y="3712463"/>
+            <a:ext cx="11064240" cy="457200"/>
+          </a:xfrm>
+          <a:prstGeom prst="rect">
+            <a:avLst/>
+          </a:prstGeom>
+          <a:noFill/>
+        </p:spPr>
+        <p:txBody>
+          <a:bodyPr wrap="square">
+            <a:spAutoFit/>
+          </a:bodyPr>
+          <a:lstStyle/>
+          <a:p>
+            <a:r>
+              <a:rPr sz="1150" b="0">
+                <a:solidFill>
+                  <a:srgbClr val="CBD5E1"/>
+                </a:solidFill>
+              </a:rPr>
+              <a:t>Code review caught two real edge cases before merge: a manager could reference itself as a worker, and duplicate worker IDs would silently collapse. Both are now filtered — verified with a dedicated test creating a manager, self-referencing it, and confirming exactly one real worker runs.</a:t>
+            </a:r>
+          </a:p>
+        </p:txBody>
+      </p:sp>
+      <p:sp>
+        <p:nvSpPr>
+          <p:cNvPr id="15" name="Rectangle 14"/>
+          <p:cNvSpPr/>
+          <p:nvPr/>
+        </p:nvSpPr>
+        <p:spPr>
+          <a:xfrm>
+            <a:off x="365760" y="4224528"/>
+            <a:ext cx="73152" cy="777240"/>
+          </a:xfrm>
+          <a:prstGeom prst="rect">
+            <a:avLst/>
+          </a:prstGeom>
+          <a:solidFill>
+            <a:srgbClr val="F59E0B"/>
+          </a:solidFill>
+          <a:ln>
+            <a:noFill/>
+          </a:ln>
+          <a:effectLst/>
+        </p:spPr>
+        <p:style>
+          <a:lnRef idx="1">
+            <a:schemeClr val="accent1"/>
+          </a:lnRef>
+          <a:fillRef idx="3">
+            <a:schemeClr val="accent1"/>
+          </a:fillRef>
+          <a:effectRef idx="2">
+            <a:schemeClr val="accent1"/>
+          </a:effectRef>
+          <a:fontRef idx="minor">
+            <a:schemeClr val="lt1"/>
+          </a:fontRef>
+        </p:style>
+        <p:txBody>
+          <a:bodyPr rtlCol="0" anchor="ctr"/>
+          <a:lstStyle/>
+          <a:p>
+            <a:pPr algn="ctr"/>
+          </a:p>
+        </p:txBody>
+      </p:sp>
+      <p:sp>
+        <p:nvSpPr>
+          <p:cNvPr id="16" name="TextBox 15"/>
+          <p:cNvSpPr txBox="1"/>
+          <p:nvPr/>
+        </p:nvSpPr>
+        <p:spPr>
+          <a:xfrm>
+            <a:off x="594360" y="4242816"/>
+            <a:ext cx="10972800" cy="365760"/>
+          </a:xfrm>
+          <a:prstGeom prst="rect">
+            <a:avLst/>
+          </a:prstGeom>
+          <a:noFill/>
+        </p:spPr>
+        <p:txBody>
+          <a:bodyPr wrap="none">
+            <a:spAutoFit/>
+          </a:bodyPr>
+          <a:lstStyle/>
+          <a:p>
+            <a:r>
+              <a:rPr sz="1600" b="1">
+                <a:solidFill>
+                  <a:srgbClr val="FFFFFF"/>
+                </a:solidFill>
+              </a:rPr>
+              <a:t>📊  Visibility Into Delegation</a:t>
+            </a:r>
+          </a:p>
+        </p:txBody>
+      </p:sp>
+      <p:sp>
+        <p:nvSpPr>
+          <p:cNvPr id="17" name="TextBox 16"/>
+          <p:cNvSpPr txBox="1"/>
+          <p:nvPr/>
+        </p:nvSpPr>
+        <p:spPr>
+          <a:xfrm>
+            <a:off x="594360" y="4608576"/>
+            <a:ext cx="11064240" cy="457200"/>
+          </a:xfrm>
+          <a:prstGeom prst="rect">
+            <a:avLst/>
+          </a:prstGeom>
+          <a:noFill/>
+        </p:spPr>
+        <p:txBody>
+          <a:bodyPr wrap="square">
+            <a:spAutoFit/>
+          </a:bodyPr>
+          <a:lstStyle/>
+          <a:p>
+            <a:r>
+              <a:rPr sz="1150" b="0">
+                <a:solidFill>
+                  <a:srgbClr val="CBD5E1"/>
+                </a:solidFill>
+              </a:rPr>
+              <a:t>Agent Studio now shows an expandable "N worker(s) invoked" panel after a manager run, listing each delegated worker's name and output — turning a black-box decision into an auditable trail.</a:t>
+            </a:r>
+          </a:p>
+        </p:txBody>
+      </p:sp>
+      <p:sp>
+        <p:nvSpPr>
+          <p:cNvPr id="18" name="Rectangle 17"/>
+          <p:cNvSpPr/>
+          <p:nvPr/>
+        </p:nvSpPr>
+        <p:spPr>
+          <a:xfrm>
+            <a:off x="365760" y="5120640"/>
+            <a:ext cx="73152" cy="777240"/>
+          </a:xfrm>
+          <a:prstGeom prst="rect">
+            <a:avLst/>
+          </a:prstGeom>
+          <a:solidFill>
+            <a:srgbClr val="0E79B2"/>
+          </a:solidFill>
+          <a:ln>
+            <a:noFill/>
+          </a:ln>
+          <a:effectLst/>
+        </p:spPr>
+        <p:style>
+          <a:lnRef idx="1">
+            <a:schemeClr val="accent1"/>
+          </a:lnRef>
+          <a:fillRef idx="3">
+            <a:schemeClr val="accent1"/>
+          </a:fillRef>
+          <a:effectRef idx="2">
+            <a:schemeClr val="accent1"/>
+          </a:effectRef>
+          <a:fontRef idx="minor">
+            <a:schemeClr val="lt1"/>
+          </a:fontRef>
+        </p:style>
+        <p:txBody>
+          <a:bodyPr rtlCol="0" anchor="ctr"/>
+          <a:lstStyle/>
+          <a:p>
+            <a:pPr algn="ctr"/>
+          </a:p>
+        </p:txBody>
+      </p:sp>
+      <p:sp>
+        <p:nvSpPr>
+          <p:cNvPr id="19" name="TextBox 18"/>
+          <p:cNvSpPr txBox="1"/>
+          <p:nvPr/>
+        </p:nvSpPr>
+        <p:spPr>
+          <a:xfrm>
+            <a:off x="594360" y="5138928"/>
+            <a:ext cx="10972800" cy="365760"/>
+          </a:xfrm>
+          <a:prstGeom prst="rect">
+            <a:avLst/>
+          </a:prstGeom>
+          <a:noFill/>
+        </p:spPr>
+        <p:txBody>
+          <a:bodyPr wrap="none">
+            <a:spAutoFit/>
+          </a:bodyPr>
+          <a:lstStyle/>
+          <a:p>
+            <a:r>
+              <a:rPr sz="1600" b="1">
+                <a:solidFill>
+                  <a:srgbClr val="FFFFFF"/>
+                </a:solidFill>
+              </a:rPr>
+              <a:t>✅  Verified End-to-End</a:t>
+            </a:r>
+          </a:p>
+        </p:txBody>
+      </p:sp>
+      <p:sp>
+        <p:nvSpPr>
+          <p:cNvPr id="20" name="TextBox 19"/>
+          <p:cNvSpPr txBox="1"/>
+          <p:nvPr/>
+        </p:nvSpPr>
+        <p:spPr>
+          <a:xfrm>
+            <a:off x="594360" y="5504688"/>
+            <a:ext cx="11064240" cy="457200"/>
+          </a:xfrm>
+          <a:prstGeom prst="rect">
+            <a:avLst/>
+          </a:prstGeom>
+          <a:noFill/>
+        </p:spPr>
+        <p:txBody>
+          <a:bodyPr wrap="square">
+            <a:spAutoFit/>
+          </a:bodyPr>
+          <a:lstStyle/>
+          <a:p>
+            <a:r>
+              <a:rPr sz="1150" b="0">
+                <a:solidFill>
+                  <a:srgbClr val="CBD5E1"/>
+                </a:solidFill>
+              </a:rPr>
+              <a:t>125 backend tests passing (7 new), TypeScript compiling clean, and a live browser run confirmed: manager delegates to a real worker agent, correct output renders, Agent Studio's "Managerial" filter tab count reflects the new agent.</a:t>
+            </a:r>
+          </a:p>
+        </p:txBody>
+      </p:sp>
+      <p:sp>
+        <p:nvSpPr>
+          <p:cNvPr id="21" name="TextBox 20"/>
+          <p:cNvSpPr txBox="1"/>
+          <p:nvPr/>
+        </p:nvSpPr>
+        <p:spPr>
+          <a:xfrm>
+            <a:off x="11640312" y="6492240"/>
             <a:ext cx="457200" cy="320040"/>
           </a:xfrm>
           <a:prstGeom prst="rect">
@@ -34655,118 +35232,7 @@
                   <a:srgbClr val="CBD5E1"/>
                 </a:solidFill>
               </a:rPr>
-              <a:t>32</a:t>
-            </a:r>
-          </a:p>
-        </p:txBody>
-      </p:sp>
-      <p:pic>
-        <p:nvPicPr>
-          <p:cNvPr id="6" name="Picture 5" descr="02_builder_templates.png"/>
-          <p:cNvPicPr>
-            <a:picLocks noChangeAspect="1"/>
-          </p:cNvPicPr>
-          <p:nvPr/>
-        </p:nvPicPr>
-        <p:blipFill>
-          <a:blip r:embed="rId2"/>
-          <a:stretch>
-            <a:fillRect/>
-          </a:stretch>
-        </p:blipFill>
-        <p:spPr>
-          <a:xfrm>
-            <a:off x="457200" y="1051560"/>
-            <a:ext cx="5486400" cy="3086100"/>
-          </a:xfrm>
-          <a:prstGeom prst="rect">
-            <a:avLst/>
-          </a:prstGeom>
-          <a:ln w="12700">
-            <a:solidFill>
-              <a:srgbClr val="334155"/>
-            </a:solidFill>
-          </a:ln>
-        </p:spPr>
-      </p:pic>
-      <p:pic>
-        <p:nvPicPr>
-          <p:cNvPr id="7" name="Picture 6" descr="03_builder_autobuild.png"/>
-          <p:cNvPicPr>
-            <a:picLocks noChangeAspect="1"/>
-          </p:cNvPicPr>
-          <p:nvPr/>
-        </p:nvPicPr>
-        <p:blipFill>
-          <a:blip r:embed="rId3"/>
-          <a:stretch>
-            <a:fillRect/>
-          </a:stretch>
-        </p:blipFill>
-        <p:spPr>
-          <a:xfrm>
-            <a:off x="6172200" y="1051560"/>
-            <a:ext cx="5486400" cy="3086100"/>
-          </a:xfrm>
-          <a:prstGeom prst="rect">
-            <a:avLst/>
-          </a:prstGeom>
-          <a:ln w="12700">
-            <a:solidFill>
-              <a:srgbClr val="334155"/>
-            </a:solidFill>
-          </a:ln>
-        </p:spPr>
-      </p:pic>
-      <p:sp>
-        <p:nvSpPr>
-          <p:cNvPr id="8" name="TextBox 7"/>
-          <p:cNvSpPr txBox="1"/>
-          <p:nvPr/>
-        </p:nvSpPr>
-        <p:spPr>
-          <a:xfrm>
-            <a:off x="457200" y="5440680"/>
-            <a:ext cx="11247120" cy="1188720"/>
-          </a:xfrm>
-          <a:prstGeom prst="rect">
-            <a:avLst/>
-          </a:prstGeom>
-          <a:noFill/>
-        </p:spPr>
-        <p:txBody>
-          <a:bodyPr wrap="square">
-            <a:spAutoFit/>
-          </a:bodyPr>
-          <a:lstStyle/>
-          <a:p>
-            <a:pPr>
-              <a:spcAft>
-                <a:spcPts val="400"/>
-              </a:spcAft>
-            </a:pPr>
-            <a:r>
-              <a:rPr sz="1100">
-                <a:solidFill>
-                  <a:srgbClr val="CBD5E1"/>
-                </a:solidFill>
-              </a:rPr>
-              <a:t>① Templates — pick from 40+ ready-made multi-agent pipelines across 10 categories (Architecture, Sales &amp; Marketing, Customer Support, and more) and load one straight onto the canvas.</a:t>
-            </a:r>
-          </a:p>
-          <a:p>
-            <a:pPr>
-              <a:spcAft>
-                <a:spcPts val="400"/>
-              </a:spcAft>
-            </a:pPr>
-            <a:r>
-              <a:rPr sz="1100">
-                <a:solidFill>
-                  <a:srgbClr val="CBD5E1"/>
-                </a:solidFill>
-              </a:rPr>
-              <a:t>② Auto-Build — describe your pipeline in plain English (“A customer support pipeline that classifies queries, routes to the right responder...”) and GPT-5.4-mini generates a 3–6 role-typed node graph automatically.</a:t>
+              <a:t>31</a:t>
             </a:r>
           </a:p>
         </p:txBody>
@@ -34780,7 +35246,7 @@
 </file>
 
 <file path=ppt/slides/slide33.xml><?xml version="1.0" encoding="utf-8"?>
-<p:sld xmlns:a="http://schemas.openxmlformats.org/drawingml/2006/main" xmlns:r="http://schemas.openxmlformats.org/officeDocument/2006/relationships" xmlns:p="http://schemas.openxmlformats.org/presentationml/2006/main">
+<p:sld xmlns:a="http://schemas.openxmlformats.org/drawingml/2006/main" xmlns:p="http://schemas.openxmlformats.org/presentationml/2006/main" xmlns:r="http://schemas.openxmlformats.org/officeDocument/2006/relationships">
   <p:cSld>
     <p:spTree>
       <p:nvGrpSpPr>
@@ -34788,14 +35254,7 @@
         <p:cNvGrpSpPr/>
         <p:nvPr/>
       </p:nvGrpSpPr>
-      <p:grpSpPr>
-        <a:xfrm>
-          <a:off x="0" y="0"/>
-          <a:ext cx="0" cy="0"/>
-          <a:chOff x="0" y="0"/>
-          <a:chExt cx="0" cy="0"/>
-        </a:xfrm>
-      </p:grpSpPr>
+      <p:grpSpPr/>
       <p:sp>
         <p:nvSpPr>
           <p:cNvPr id="2" name="Rectangle 1"/>
@@ -34805,7 +35264,7 @@
         <p:spPr>
           <a:xfrm>
             <a:off x="0" y="0"/>
-            <a:ext cx="12188825" cy="6858000"/>
+            <a:ext cx="12188952" cy="6858000"/>
           </a:xfrm>
           <a:prstGeom prst="rect">
             <a:avLst/>
@@ -34837,7 +35296,6 @@
           <a:lstStyle/>
           <a:p>
             <a:pPr algn="ctr"/>
-            <a:endParaRPr/>
           </a:p>
         </p:txBody>
       </p:sp>
@@ -34850,7 +35308,7 @@
         <p:spPr>
           <a:xfrm>
             <a:off x="0" y="73152"/>
-            <a:ext cx="12188825" cy="45720"/>
+            <a:ext cx="12188952" cy="45720"/>
           </a:xfrm>
           <a:prstGeom prst="rect">
             <a:avLst/>
@@ -34882,7 +35340,6 @@
           <a:lstStyle/>
           <a:p>
             <a:pPr algn="ctr"/>
-            <a:endParaRPr/>
           </a:p>
         </p:txBody>
       </p:sp>
@@ -34909,12 +35366,12 @@
           <a:lstStyle/>
           <a:p>
             <a:r>
-              <a:rPr sz="2600" b="1">
+              <a:rPr sz="2700" b="1">
                 <a:solidFill>
                   <a:srgbClr val="FFFFFF"/>
                 </a:solidFill>
               </a:rPr>
-              <a:t>How To Use: Visual Builder — Configure, Export &amp; Import</a:t>
+              <a:t>Manager Agents — ROI &amp; Leadership Narrative</a:t>
             </a:r>
           </a:p>
         </p:txBody>
@@ -34927,7 +35384,590 @@
         </p:nvSpPr>
         <p:spPr>
           <a:xfrm>
-            <a:off x="11731752" y="6492240"/>
+            <a:off x="457200" y="868680"/>
+            <a:ext cx="11247120" cy="548640"/>
+          </a:xfrm>
+          <a:prstGeom prst="rect">
+            <a:avLst/>
+          </a:prstGeom>
+          <a:noFill/>
+        </p:spPr>
+        <p:txBody>
+          <a:bodyPr wrap="square">
+            <a:spAutoFit/>
+          </a:bodyPr>
+          <a:lstStyle/>
+          <a:p>
+            <a:r>
+              <a:rPr sz="1300" b="0">
+                <a:solidFill>
+                  <a:srgbClr val="CBD5E1"/>
+                </a:solidFill>
+              </a:rPr>
+              <a:t>Why this matters beyond the code: what it changes for build velocity, and how to talk about it with leadership.</a:t>
+            </a:r>
+          </a:p>
+        </p:txBody>
+      </p:sp>
+      <p:sp>
+        <p:nvSpPr>
+          <p:cNvPr id="6" name="Rectangle 5"/>
+          <p:cNvSpPr/>
+          <p:nvPr/>
+        </p:nvSpPr>
+        <p:spPr>
+          <a:xfrm>
+            <a:off x="365760" y="1536192"/>
+            <a:ext cx="73152" cy="777240"/>
+          </a:xfrm>
+          <a:prstGeom prst="rect">
+            <a:avLst/>
+          </a:prstGeom>
+          <a:solidFill>
+            <a:srgbClr val="606EF5"/>
+          </a:solidFill>
+          <a:ln>
+            <a:noFill/>
+          </a:ln>
+          <a:effectLst/>
+        </p:spPr>
+        <p:style>
+          <a:lnRef idx="1">
+            <a:schemeClr val="accent1"/>
+          </a:lnRef>
+          <a:fillRef idx="3">
+            <a:schemeClr val="accent1"/>
+          </a:fillRef>
+          <a:effectRef idx="2">
+            <a:schemeClr val="accent1"/>
+          </a:effectRef>
+          <a:fontRef idx="minor">
+            <a:schemeClr val="lt1"/>
+          </a:fontRef>
+        </p:style>
+        <p:txBody>
+          <a:bodyPr rtlCol="0" anchor="ctr"/>
+          <a:lstStyle/>
+          <a:p>
+            <a:pPr algn="ctr"/>
+          </a:p>
+        </p:txBody>
+      </p:sp>
+      <p:sp>
+        <p:nvSpPr>
+          <p:cNvPr id="7" name="TextBox 6"/>
+          <p:cNvSpPr txBox="1"/>
+          <p:nvPr/>
+        </p:nvSpPr>
+        <p:spPr>
+          <a:xfrm>
+            <a:off x="594360" y="1554480"/>
+            <a:ext cx="10972800" cy="365760"/>
+          </a:xfrm>
+          <a:prstGeom prst="rect">
+            <a:avLst/>
+          </a:prstGeom>
+          <a:noFill/>
+        </p:spPr>
+        <p:txBody>
+          <a:bodyPr wrap="none">
+            <a:spAutoFit/>
+          </a:bodyPr>
+          <a:lstStyle/>
+          <a:p>
+            <a:r>
+              <a:rPr sz="1600" b="1">
+                <a:solidFill>
+                  <a:srgbClr val="FFFFFF"/>
+                </a:solidFill>
+              </a:rPr>
+              <a:t>💰  Build-Velocity ROI</a:t>
+            </a:r>
+          </a:p>
+        </p:txBody>
+      </p:sp>
+      <p:sp>
+        <p:nvSpPr>
+          <p:cNvPr id="8" name="TextBox 7"/>
+          <p:cNvSpPr txBox="1"/>
+          <p:nvPr/>
+        </p:nvSpPr>
+        <p:spPr>
+          <a:xfrm>
+            <a:off x="594360" y="1920240"/>
+            <a:ext cx="11064240" cy="457200"/>
+          </a:xfrm>
+          <a:prstGeom prst="rect">
+            <a:avLst/>
+          </a:prstGeom>
+          <a:noFill/>
+        </p:spPr>
+        <p:txBody>
+          <a:bodyPr wrap="square">
+            <a:spAutoFit/>
+          </a:bodyPr>
+          <a:lstStyle/>
+          <a:p>
+            <a:r>
+              <a:rPr sz="1150" b="0">
+                <a:solidFill>
+                  <a:srgbClr val="CBD5E1"/>
+                </a:solidFill>
+              </a:rPr>
+              <a:t>Multi-step workflows that previously required manually drawing every branch in Visual Builder can now be delegated to a single Manager Agent that decides its own execution path per request — fewer workflows to design, test, and maintain per use case.</a:t>
+            </a:r>
+          </a:p>
+        </p:txBody>
+      </p:sp>
+      <p:sp>
+        <p:nvSpPr>
+          <p:cNvPr id="9" name="Rectangle 8"/>
+          <p:cNvSpPr/>
+          <p:nvPr/>
+        </p:nvSpPr>
+        <p:spPr>
+          <a:xfrm>
+            <a:off x="365760" y="2432304"/>
+            <a:ext cx="73152" cy="777240"/>
+          </a:xfrm>
+          <a:prstGeom prst="rect">
+            <a:avLst/>
+          </a:prstGeom>
+          <a:solidFill>
+            <a:srgbClr val="10B981"/>
+          </a:solidFill>
+          <a:ln>
+            <a:noFill/>
+          </a:ln>
+          <a:effectLst/>
+        </p:spPr>
+        <p:style>
+          <a:lnRef idx="1">
+            <a:schemeClr val="accent1"/>
+          </a:lnRef>
+          <a:fillRef idx="3">
+            <a:schemeClr val="accent1"/>
+          </a:fillRef>
+          <a:effectRef idx="2">
+            <a:schemeClr val="accent1"/>
+          </a:effectRef>
+          <a:fontRef idx="minor">
+            <a:schemeClr val="lt1"/>
+          </a:fontRef>
+        </p:style>
+        <p:txBody>
+          <a:bodyPr rtlCol="0" anchor="ctr"/>
+          <a:lstStyle/>
+          <a:p>
+            <a:pPr algn="ctr"/>
+          </a:p>
+        </p:txBody>
+      </p:sp>
+      <p:sp>
+        <p:nvSpPr>
+          <p:cNvPr id="10" name="TextBox 9"/>
+          <p:cNvSpPr txBox="1"/>
+          <p:nvPr/>
+        </p:nvSpPr>
+        <p:spPr>
+          <a:xfrm>
+            <a:off x="594360" y="2450592"/>
+            <a:ext cx="10972800" cy="365760"/>
+          </a:xfrm>
+          <a:prstGeom prst="rect">
+            <a:avLst/>
+          </a:prstGeom>
+          <a:noFill/>
+        </p:spPr>
+        <p:txBody>
+          <a:bodyPr wrap="none">
+            <a:spAutoFit/>
+          </a:bodyPr>
+          <a:lstStyle/>
+          <a:p>
+            <a:r>
+              <a:rPr sz="1600" b="1">
+                <a:solidFill>
+                  <a:srgbClr val="FFFFFF"/>
+                </a:solidFill>
+              </a:rPr>
+              <a:t>🏆  Competitive ROI</a:t>
+            </a:r>
+          </a:p>
+        </p:txBody>
+      </p:sp>
+      <p:sp>
+        <p:nvSpPr>
+          <p:cNvPr id="11" name="TextBox 10"/>
+          <p:cNvSpPr txBox="1"/>
+          <p:nvPr/>
+        </p:nvSpPr>
+        <p:spPr>
+          <a:xfrm>
+            <a:off x="594360" y="2816352"/>
+            <a:ext cx="11064240" cy="457200"/>
+          </a:xfrm>
+          <a:prstGeom prst="rect">
+            <a:avLst/>
+          </a:prstGeom>
+          <a:noFill/>
+        </p:spPr>
+        <p:txBody>
+          <a:bodyPr wrap="square">
+            <a:spAutoFit/>
+          </a:bodyPr>
+          <a:lstStyle/>
+          <a:p>
+            <a:r>
+              <a:rPr sz="1150" b="0">
+                <a:solidFill>
+                  <a:srgbClr val="CBD5E1"/>
+                </a:solidFill>
+              </a:rPr>
+              <a:t>Directly answers Lyzr AI's "Manager Agents" and dynamic-delegation pitch — a capability gap flagged in this cycle's head-to-head test pass is now closed, without adopting Lyzr's SaaS-only lock-in (AgentForge still ships full code export).</a:t>
+            </a:r>
+          </a:p>
+        </p:txBody>
+      </p:sp>
+      <p:sp>
+        <p:nvSpPr>
+          <p:cNvPr id="12" name="Rectangle 11"/>
+          <p:cNvSpPr/>
+          <p:nvPr/>
+        </p:nvSpPr>
+        <p:spPr>
+          <a:xfrm>
+            <a:off x="365760" y="3328415"/>
+            <a:ext cx="73152" cy="777240"/>
+          </a:xfrm>
+          <a:prstGeom prst="rect">
+            <a:avLst/>
+          </a:prstGeom>
+          <a:solidFill>
+            <a:srgbClr val="F59E0B"/>
+          </a:solidFill>
+          <a:ln>
+            <a:noFill/>
+          </a:ln>
+          <a:effectLst/>
+        </p:spPr>
+        <p:style>
+          <a:lnRef idx="1">
+            <a:schemeClr val="accent1"/>
+          </a:lnRef>
+          <a:fillRef idx="3">
+            <a:schemeClr val="accent1"/>
+          </a:fillRef>
+          <a:effectRef idx="2">
+            <a:schemeClr val="accent1"/>
+          </a:effectRef>
+          <a:fontRef idx="minor">
+            <a:schemeClr val="lt1"/>
+          </a:fontRef>
+        </p:style>
+        <p:txBody>
+          <a:bodyPr rtlCol="0" anchor="ctr"/>
+          <a:lstStyle/>
+          <a:p>
+            <a:pPr algn="ctr"/>
+          </a:p>
+        </p:txBody>
+      </p:sp>
+      <p:sp>
+        <p:nvSpPr>
+          <p:cNvPr id="13" name="TextBox 12"/>
+          <p:cNvSpPr txBox="1"/>
+          <p:nvPr/>
+        </p:nvSpPr>
+        <p:spPr>
+          <a:xfrm>
+            <a:off x="594360" y="3346703"/>
+            <a:ext cx="10972800" cy="365760"/>
+          </a:xfrm>
+          <a:prstGeom prst="rect">
+            <a:avLst/>
+          </a:prstGeom>
+          <a:noFill/>
+        </p:spPr>
+        <p:txBody>
+          <a:bodyPr wrap="none">
+            <a:spAutoFit/>
+          </a:bodyPr>
+          <a:lstStyle/>
+          <a:p>
+            <a:r>
+              <a:rPr sz="1600" b="1">
+                <a:solidFill>
+                  <a:srgbClr val="FFFFFF"/>
+                </a:solidFill>
+              </a:rPr>
+              <a:t>🎯  Leadership Definition — What To Say</a:t>
+            </a:r>
+          </a:p>
+        </p:txBody>
+      </p:sp>
+      <p:sp>
+        <p:nvSpPr>
+          <p:cNvPr id="14" name="TextBox 13"/>
+          <p:cNvSpPr txBox="1"/>
+          <p:nvPr/>
+        </p:nvSpPr>
+        <p:spPr>
+          <a:xfrm>
+            <a:off x="594360" y="3712463"/>
+            <a:ext cx="11064240" cy="457200"/>
+          </a:xfrm>
+          <a:prstGeom prst="rect">
+            <a:avLst/>
+          </a:prstGeom>
+          <a:noFill/>
+        </p:spPr>
+        <p:txBody>
+          <a:bodyPr wrap="square">
+            <a:spAutoFit/>
+          </a:bodyPr>
+          <a:lstStyle/>
+          <a:p>
+            <a:r>
+              <a:rPr sz="1150" b="0">
+                <a:solidFill>
+                  <a:srgbClr val="CBD5E1"/>
+                </a:solidFill>
+              </a:rPr>
+              <a:t>"AgentForge agents can now supervise other agents — a Manager Agent looks at a goal, decides which of its specialist agents are relevant, and runs only those, in the right order. This is the same 'agentic orchestration' capability enterprise buyers ask about when evaluating AI platforms."</a:t>
+            </a:r>
+          </a:p>
+        </p:txBody>
+      </p:sp>
+      <p:sp>
+        <p:nvSpPr>
+          <p:cNvPr id="15" name="Rectangle 14"/>
+          <p:cNvSpPr/>
+          <p:nvPr/>
+        </p:nvSpPr>
+        <p:spPr>
+          <a:xfrm>
+            <a:off x="365760" y="4224528"/>
+            <a:ext cx="73152" cy="777240"/>
+          </a:xfrm>
+          <a:prstGeom prst="rect">
+            <a:avLst/>
+          </a:prstGeom>
+          <a:solidFill>
+            <a:srgbClr val="DC2626"/>
+          </a:solidFill>
+          <a:ln>
+            <a:noFill/>
+          </a:ln>
+          <a:effectLst/>
+        </p:spPr>
+        <p:style>
+          <a:lnRef idx="1">
+            <a:schemeClr val="accent1"/>
+          </a:lnRef>
+          <a:fillRef idx="3">
+            <a:schemeClr val="accent1"/>
+          </a:fillRef>
+          <a:effectRef idx="2">
+            <a:schemeClr val="accent1"/>
+          </a:effectRef>
+          <a:fontRef idx="minor">
+            <a:schemeClr val="lt1"/>
+          </a:fontRef>
+        </p:style>
+        <p:txBody>
+          <a:bodyPr rtlCol="0" anchor="ctr"/>
+          <a:lstStyle/>
+          <a:p>
+            <a:pPr algn="ctr"/>
+          </a:p>
+        </p:txBody>
+      </p:sp>
+      <p:sp>
+        <p:nvSpPr>
+          <p:cNvPr id="16" name="TextBox 15"/>
+          <p:cNvSpPr txBox="1"/>
+          <p:nvPr/>
+        </p:nvSpPr>
+        <p:spPr>
+          <a:xfrm>
+            <a:off x="594360" y="4242816"/>
+            <a:ext cx="10972800" cy="365760"/>
+          </a:xfrm>
+          <a:prstGeom prst="rect">
+            <a:avLst/>
+          </a:prstGeom>
+          <a:noFill/>
+        </p:spPr>
+        <p:txBody>
+          <a:bodyPr wrap="none">
+            <a:spAutoFit/>
+          </a:bodyPr>
+          <a:lstStyle/>
+          <a:p>
+            <a:r>
+              <a:rPr sz="1600" b="1">
+                <a:solidFill>
+                  <a:srgbClr val="FFFFFF"/>
+                </a:solidFill>
+              </a:rPr>
+              <a:t>⚠️  Honest Scope — What This Is NOT (Yet)</a:t>
+            </a:r>
+          </a:p>
+        </p:txBody>
+      </p:sp>
+      <p:sp>
+        <p:nvSpPr>
+          <p:cNvPr id="17" name="TextBox 16"/>
+          <p:cNvSpPr txBox="1"/>
+          <p:nvPr/>
+        </p:nvSpPr>
+        <p:spPr>
+          <a:xfrm>
+            <a:off x="594360" y="4608576"/>
+            <a:ext cx="11064240" cy="457200"/>
+          </a:xfrm>
+          <a:prstGeom prst="rect">
+            <a:avLst/>
+          </a:prstGeom>
+          <a:noFill/>
+        </p:spPr>
+        <p:txBody>
+          <a:bodyPr wrap="square">
+            <a:spAutoFit/>
+          </a:bodyPr>
+          <a:lstStyle/>
+          <a:p>
+            <a:r>
+              <a:rPr sz="1150" b="0">
+                <a:solidFill>
+                  <a:srgbClr val="CBD5E1"/>
+                </a:solidFill>
+              </a:rPr>
+              <a:t>v1 workers are plain agents only — a manager cannot yet delegate into a full approval-gated Visual Builder workflow. This was a deliberate scope call to ship a safe, tested v1 first rather than take on untested pause/resume complexity on day one.</a:t>
+            </a:r>
+          </a:p>
+        </p:txBody>
+      </p:sp>
+      <p:sp>
+        <p:nvSpPr>
+          <p:cNvPr id="18" name="Rectangle 17"/>
+          <p:cNvSpPr/>
+          <p:nvPr/>
+        </p:nvSpPr>
+        <p:spPr>
+          <a:xfrm>
+            <a:off x="365760" y="5120640"/>
+            <a:ext cx="73152" cy="777240"/>
+          </a:xfrm>
+          <a:prstGeom prst="rect">
+            <a:avLst/>
+          </a:prstGeom>
+          <a:solidFill>
+            <a:srgbClr val="0E79B2"/>
+          </a:solidFill>
+          <a:ln>
+            <a:noFill/>
+          </a:ln>
+          <a:effectLst/>
+        </p:spPr>
+        <p:style>
+          <a:lnRef idx="1">
+            <a:schemeClr val="accent1"/>
+          </a:lnRef>
+          <a:fillRef idx="3">
+            <a:schemeClr val="accent1"/>
+          </a:fillRef>
+          <a:effectRef idx="2">
+            <a:schemeClr val="accent1"/>
+          </a:effectRef>
+          <a:fontRef idx="minor">
+            <a:schemeClr val="lt1"/>
+          </a:fontRef>
+        </p:style>
+        <p:txBody>
+          <a:bodyPr rtlCol="0" anchor="ctr"/>
+          <a:lstStyle/>
+          <a:p>
+            <a:pPr algn="ctr"/>
+          </a:p>
+        </p:txBody>
+      </p:sp>
+      <p:sp>
+        <p:nvSpPr>
+          <p:cNvPr id="19" name="TextBox 18"/>
+          <p:cNvSpPr txBox="1"/>
+          <p:nvPr/>
+        </p:nvSpPr>
+        <p:spPr>
+          <a:xfrm>
+            <a:off x="594360" y="5138928"/>
+            <a:ext cx="10972800" cy="365760"/>
+          </a:xfrm>
+          <a:prstGeom prst="rect">
+            <a:avLst/>
+          </a:prstGeom>
+          <a:noFill/>
+        </p:spPr>
+        <p:txBody>
+          <a:bodyPr wrap="none">
+            <a:spAutoFit/>
+          </a:bodyPr>
+          <a:lstStyle/>
+          <a:p>
+            <a:r>
+              <a:rPr sz="1600" b="1">
+                <a:solidFill>
+                  <a:srgbClr val="FFFFFF"/>
+                </a:solidFill>
+              </a:rPr>
+              <a:t>🔭  Natural v2</a:t>
+            </a:r>
+          </a:p>
+        </p:txBody>
+      </p:sp>
+      <p:sp>
+        <p:nvSpPr>
+          <p:cNvPr id="20" name="TextBox 19"/>
+          <p:cNvSpPr txBox="1"/>
+          <p:nvPr/>
+        </p:nvSpPr>
+        <p:spPr>
+          <a:xfrm>
+            <a:off x="594360" y="5504688"/>
+            <a:ext cx="11064240" cy="457200"/>
+          </a:xfrm>
+          <a:prstGeom prst="rect">
+            <a:avLst/>
+          </a:prstGeom>
+          <a:noFill/>
+        </p:spPr>
+        <p:txBody>
+          <a:bodyPr wrap="square">
+            <a:spAutoFit/>
+          </a:bodyPr>
+          <a:lstStyle/>
+          <a:p>
+            <a:r>
+              <a:rPr sz="1150" b="0">
+                <a:solidFill>
+                  <a:srgbClr val="CBD5E1"/>
+                </a:solidFill>
+              </a:rPr>
+              <a:t>Once this v1 is proven in real use, the next step is letting a Manager Agent delegate into a full pausable workflow — composing with the already-tested Human-in-the-Loop approval engine (20/20 tests passing) rather than bypassing it.</a:t>
+            </a:r>
+          </a:p>
+        </p:txBody>
+      </p:sp>
+      <p:sp>
+        <p:nvSpPr>
+          <p:cNvPr id="21" name="TextBox 20"/>
+          <p:cNvSpPr txBox="1"/>
+          <p:nvPr/>
+        </p:nvSpPr>
+        <p:spPr>
+          <a:xfrm>
+            <a:off x="11640312" y="6492240"/>
             <a:ext cx="457200" cy="320040"/>
           </a:xfrm>
           <a:prstGeom prst="rect">
@@ -34947,118 +35987,7 @@
                   <a:srgbClr val="CBD5E1"/>
                 </a:solidFill>
               </a:rPr>
-              <a:t>33</a:t>
-            </a:r>
-          </a:p>
-        </p:txBody>
-      </p:sp>
-      <p:pic>
-        <p:nvPicPr>
-          <p:cNvPr id="6" name="Picture 5" descr="04_builder_agent_config.png"/>
-          <p:cNvPicPr>
-            <a:picLocks noChangeAspect="1"/>
-          </p:cNvPicPr>
-          <p:nvPr/>
-        </p:nvPicPr>
-        <p:blipFill>
-          <a:blip r:embed="rId2"/>
-          <a:stretch>
-            <a:fillRect/>
-          </a:stretch>
-        </p:blipFill>
-        <p:spPr>
-          <a:xfrm>
-            <a:off x="457200" y="1051560"/>
-            <a:ext cx="5486400" cy="3086100"/>
-          </a:xfrm>
-          <a:prstGeom prst="rect">
-            <a:avLst/>
-          </a:prstGeom>
-          <a:ln w="12700">
-            <a:solidFill>
-              <a:srgbClr val="334155"/>
-            </a:solidFill>
-          </a:ln>
-        </p:spPr>
-      </p:pic>
-      <p:pic>
-        <p:nvPicPr>
-          <p:cNvPr id="7" name="Picture 6" descr="05_builder_export_code.png"/>
-          <p:cNvPicPr>
-            <a:picLocks noChangeAspect="1"/>
-          </p:cNvPicPr>
-          <p:nvPr/>
-        </p:nvPicPr>
-        <p:blipFill>
-          <a:blip r:embed="rId3"/>
-          <a:stretch>
-            <a:fillRect/>
-          </a:stretch>
-        </p:blipFill>
-        <p:spPr>
-          <a:xfrm>
-            <a:off x="6172200" y="1051560"/>
-            <a:ext cx="5486400" cy="3086100"/>
-          </a:xfrm>
-          <a:prstGeom prst="rect">
-            <a:avLst/>
-          </a:prstGeom>
-          <a:ln w="12700">
-            <a:solidFill>
-              <a:srgbClr val="334155"/>
-            </a:solidFill>
-          </a:ln>
-        </p:spPr>
-      </p:pic>
-      <p:sp>
-        <p:nvSpPr>
-          <p:cNvPr id="8" name="TextBox 7"/>
-          <p:cNvSpPr txBox="1"/>
-          <p:nvPr/>
-        </p:nvSpPr>
-        <p:spPr>
-          <a:xfrm>
-            <a:off x="457200" y="5440680"/>
-            <a:ext cx="11247120" cy="1188720"/>
-          </a:xfrm>
-          <a:prstGeom prst="rect">
-            <a:avLst/>
-          </a:prstGeom>
-          <a:noFill/>
-        </p:spPr>
-        <p:txBody>
-          <a:bodyPr wrap="square">
-            <a:spAutoFit/>
-          </a:bodyPr>
-          <a:lstStyle/>
-          <a:p>
-            <a:pPr>
-              <a:spcAft>
-                <a:spcPts val="400"/>
-              </a:spcAft>
-            </a:pPr>
-            <a:r>
-              <a:rPr sz="1100">
-                <a:solidFill>
-                  <a:srgbClr val="CBD5E1"/>
-                </a:solidFill>
-              </a:rPr>
-              <a:t>① Configure — click any node to set its Role, System Prompt, Model (Local Model or Azure GPT-5.4-mini, per agent), Tools, and always-on Guardrails, then Save Agent.</a:t>
-            </a:r>
-          </a:p>
-          <a:p>
-            <a:pPr>
-              <a:spcAft>
-                <a:spcPts val="400"/>
-              </a:spcAft>
-            </a:pPr>
-            <a:r>
-              <a:rPr sz="1100">
-                <a:solidFill>
-                  <a:srgbClr val="CBD5E1"/>
-                </a:solidFill>
-              </a:rPr>
-              <a:t>② Export / Import — Export Code generates a faithful Python script with the same execution logic as the live engine; Export JSON / Import JSON give a lossless, round-trippable workflow backup.</a:t>
+              <a:t>32</a:t>
             </a:r>
           </a:p>
         </p:txBody>
@@ -35072,7 +36001,7 @@
 </file>
 
 <file path=ppt/slides/slide34.xml><?xml version="1.0" encoding="utf-8"?>
-<p:sld xmlns:a="http://schemas.openxmlformats.org/drawingml/2006/main" xmlns:r="http://schemas.openxmlformats.org/officeDocument/2006/relationships" xmlns:p="http://schemas.openxmlformats.org/presentationml/2006/main">
+<p:sld xmlns:a="http://schemas.openxmlformats.org/drawingml/2006/main" xmlns:p="http://schemas.openxmlformats.org/presentationml/2006/main" xmlns:r="http://schemas.openxmlformats.org/officeDocument/2006/relationships">
   <p:cSld>
     <p:spTree>
       <p:nvGrpSpPr>
@@ -35080,14 +36009,7 @@
         <p:cNvGrpSpPr/>
         <p:nvPr/>
       </p:nvGrpSpPr>
-      <p:grpSpPr>
-        <a:xfrm>
-          <a:off x="0" y="0"/>
-          <a:ext cx="0" cy="0"/>
-          <a:chOff x="0" y="0"/>
-          <a:chExt cx="0" cy="0"/>
-        </a:xfrm>
-      </p:grpSpPr>
+      <p:grpSpPr/>
       <p:sp>
         <p:nvSpPr>
           <p:cNvPr id="2" name="Rectangle 1"/>
@@ -35097,7 +36019,7 @@
         <p:spPr>
           <a:xfrm>
             <a:off x="0" y="0"/>
-            <a:ext cx="12188825" cy="6858000"/>
+            <a:ext cx="12188952" cy="6858000"/>
           </a:xfrm>
           <a:prstGeom prst="rect">
             <a:avLst/>
@@ -35129,7 +36051,6 @@
           <a:lstStyle/>
           <a:p>
             <a:pPr algn="ctr"/>
-            <a:endParaRPr/>
           </a:p>
         </p:txBody>
       </p:sp>
@@ -35142,7 +36063,7 @@
         <p:spPr>
           <a:xfrm>
             <a:off x="0" y="73152"/>
-            <a:ext cx="12188825" cy="45720"/>
+            <a:ext cx="12188952" cy="45720"/>
           </a:xfrm>
           <a:prstGeom prst="rect">
             <a:avLst/>
@@ -35174,7 +36095,6 @@
           <a:lstStyle/>
           <a:p>
             <a:pPr algn="ctr"/>
-            <a:endParaRPr/>
           </a:p>
         </p:txBody>
       </p:sp>
@@ -35201,12 +36121,12 @@
           <a:lstStyle/>
           <a:p>
             <a:r>
-              <a:rPr sz="2600" b="1">
+              <a:rPr sz="2700" b="1">
                 <a:solidFill>
                   <a:srgbClr val="FFFFFF"/>
                 </a:solidFill>
               </a:rPr>
-              <a:t>How To Use: Visual Builder — Run &amp; Deploy</a:t>
+              <a:t>Lyzr-Parity Scorecard — Status &amp; Remaining Gaps</a:t>
             </a:r>
           </a:p>
         </p:txBody>
@@ -35219,7 +36139,1096 @@
         </p:nvSpPr>
         <p:spPr>
           <a:xfrm>
-            <a:off x="11731752" y="6492240"/>
+            <a:off x="457200" y="868680"/>
+            <a:ext cx="11247120" cy="548640"/>
+          </a:xfrm>
+          <a:prstGeom prst="rect">
+            <a:avLst/>
+          </a:prstGeom>
+          <a:noFill/>
+        </p:spPr>
+        <p:txBody>
+          <a:bodyPr wrap="square">
+            <a:spAutoFit/>
+          </a:bodyPr>
+          <a:lstStyle/>
+          <a:p>
+            <a:r>
+              <a:rPr sz="1300" b="0">
+                <a:solidFill>
+                  <a:srgbClr val="CBD5E1"/>
+                </a:solidFill>
+              </a:rPr>
+              <a:t>Four gaps were identified in the competitive test pass this cycle. One is closed; three remain open and unscheduled.</a:t>
+            </a:r>
+          </a:p>
+        </p:txBody>
+      </p:sp>
+      <p:sp>
+        <p:nvSpPr>
+          <p:cNvPr id="6" name="Rectangle 5"/>
+          <p:cNvSpPr/>
+          <p:nvPr/>
+        </p:nvSpPr>
+        <p:spPr>
+          <a:xfrm>
+            <a:off x="365760" y="960120"/>
+            <a:ext cx="3703320" cy="2514600"/>
+          </a:xfrm>
+          <a:prstGeom prst="rect">
+            <a:avLst/>
+          </a:prstGeom>
+          <a:solidFill>
+            <a:srgbClr val="1E2A45"/>
+          </a:solidFill>
+          <a:ln>
+            <a:noFill/>
+          </a:ln>
+          <a:effectLst/>
+        </p:spPr>
+        <p:style>
+          <a:lnRef idx="1">
+            <a:schemeClr val="accent1"/>
+          </a:lnRef>
+          <a:fillRef idx="3">
+            <a:schemeClr val="accent1"/>
+          </a:fillRef>
+          <a:effectRef idx="2">
+            <a:schemeClr val="accent1"/>
+          </a:effectRef>
+          <a:fontRef idx="minor">
+            <a:schemeClr val="lt1"/>
+          </a:fontRef>
+        </p:style>
+        <p:txBody>
+          <a:bodyPr rtlCol="0" anchor="ctr"/>
+          <a:lstStyle/>
+          <a:p>
+            <a:pPr algn="ctr"/>
+          </a:p>
+        </p:txBody>
+      </p:sp>
+      <p:sp>
+        <p:nvSpPr>
+          <p:cNvPr id="7" name="TextBox 6"/>
+          <p:cNvSpPr txBox="1"/>
+          <p:nvPr/>
+        </p:nvSpPr>
+        <p:spPr>
+          <a:xfrm>
+            <a:off x="502920" y="1069848"/>
+            <a:ext cx="3429000" cy="411480"/>
+          </a:xfrm>
+          <a:prstGeom prst="rect">
+            <a:avLst/>
+          </a:prstGeom>
+          <a:noFill/>
+        </p:spPr>
+        <p:txBody>
+          <a:bodyPr wrap="none">
+            <a:spAutoFit/>
+          </a:bodyPr>
+          <a:lstStyle/>
+          <a:p>
+            <a:r>
+              <a:rPr sz="1300" b="1">
+                <a:solidFill>
+                  <a:srgbClr val="10B981"/>
+                </a:solidFill>
+              </a:rPr>
+              <a:t>✅ Manager Agents</a:t>
+            </a:r>
+          </a:p>
+        </p:txBody>
+      </p:sp>
+      <p:sp>
+        <p:nvSpPr>
+          <p:cNvPr id="8" name="TextBox 7"/>
+          <p:cNvSpPr txBox="1"/>
+          <p:nvPr/>
+        </p:nvSpPr>
+        <p:spPr>
+          <a:xfrm>
+            <a:off x="502920" y="1463040"/>
+            <a:ext cx="1463040" cy="640080"/>
+          </a:xfrm>
+          <a:prstGeom prst="rect">
+            <a:avLst/>
+          </a:prstGeom>
+          <a:noFill/>
+        </p:spPr>
+        <p:txBody>
+          <a:bodyPr wrap="none">
+            <a:spAutoFit/>
+          </a:bodyPr>
+          <a:lstStyle/>
+          <a:p>
+            <a:r>
+              <a:rPr sz="2800" b="1">
+                <a:solidFill>
+                  <a:srgbClr val="FFFFFF"/>
+                </a:solidFill>
+              </a:rPr>
+              <a:t>DONE</a:t>
+            </a:r>
+          </a:p>
+        </p:txBody>
+      </p:sp>
+      <p:sp>
+        <p:nvSpPr>
+          <p:cNvPr id="9" name="TextBox 8"/>
+          <p:cNvSpPr txBox="1"/>
+          <p:nvPr/>
+        </p:nvSpPr>
+        <p:spPr>
+          <a:xfrm>
+            <a:off x="502920" y="2039112"/>
+            <a:ext cx="3474720" cy="320040"/>
+          </a:xfrm>
+          <a:prstGeom prst="rect">
+            <a:avLst/>
+          </a:prstGeom>
+          <a:noFill/>
+        </p:spPr>
+        <p:txBody>
+          <a:bodyPr wrap="none">
+            <a:spAutoFit/>
+          </a:bodyPr>
+          <a:lstStyle/>
+          <a:p>
+            <a:r>
+              <a:rPr sz="1100" b="1">
+                <a:solidFill>
+                  <a:srgbClr val="10B981"/>
+                </a:solidFill>
+              </a:rPr>
+              <a:t>Dynamic goal decomposition</a:t>
+            </a:r>
+          </a:p>
+        </p:txBody>
+      </p:sp>
+      <p:sp>
+        <p:nvSpPr>
+          <p:cNvPr id="10" name="TextBox 9"/>
+          <p:cNvSpPr txBox="1"/>
+          <p:nvPr/>
+        </p:nvSpPr>
+        <p:spPr>
+          <a:xfrm>
+            <a:off x="502920" y="2350008"/>
+            <a:ext cx="3474720" cy="1051560"/>
+          </a:xfrm>
+          <a:prstGeom prst="rect">
+            <a:avLst/>
+          </a:prstGeom>
+          <a:noFill/>
+        </p:spPr>
+        <p:txBody>
+          <a:bodyPr wrap="square">
+            <a:spAutoFit/>
+          </a:bodyPr>
+          <a:lstStyle/>
+          <a:p>
+            <a:r>
+              <a:rPr sz="950" b="0">
+                <a:solidFill>
+                  <a:srgbClr val="CBD5E1"/>
+                </a:solidFill>
+              </a:rPr>
+              <a:t>MultiAgentOrchestrator wired into a real endpoint + Agent Studio UI. Plain-agent workers only in v1; workflow-worker delegation is a planned v2.</a:t>
+            </a:r>
+          </a:p>
+        </p:txBody>
+      </p:sp>
+      <p:sp>
+        <p:nvSpPr>
+          <p:cNvPr id="11" name="Rectangle 10"/>
+          <p:cNvSpPr/>
+          <p:nvPr/>
+        </p:nvSpPr>
+        <p:spPr>
+          <a:xfrm>
+            <a:off x="4297680" y="960120"/>
+            <a:ext cx="3703320" cy="2514600"/>
+          </a:xfrm>
+          <a:prstGeom prst="rect">
+            <a:avLst/>
+          </a:prstGeom>
+          <a:solidFill>
+            <a:srgbClr val="1E2A45"/>
+          </a:solidFill>
+          <a:ln>
+            <a:noFill/>
+          </a:ln>
+          <a:effectLst/>
+        </p:spPr>
+        <p:style>
+          <a:lnRef idx="1">
+            <a:schemeClr val="accent1"/>
+          </a:lnRef>
+          <a:fillRef idx="3">
+            <a:schemeClr val="accent1"/>
+          </a:fillRef>
+          <a:effectRef idx="2">
+            <a:schemeClr val="accent1"/>
+          </a:effectRef>
+          <a:fontRef idx="minor">
+            <a:schemeClr val="lt1"/>
+          </a:fontRef>
+        </p:style>
+        <p:txBody>
+          <a:bodyPr rtlCol="0" anchor="ctr"/>
+          <a:lstStyle/>
+          <a:p>
+            <a:pPr algn="ctr"/>
+          </a:p>
+        </p:txBody>
+      </p:sp>
+      <p:sp>
+        <p:nvSpPr>
+          <p:cNvPr id="12" name="TextBox 11"/>
+          <p:cNvSpPr txBox="1"/>
+          <p:nvPr/>
+        </p:nvSpPr>
+        <p:spPr>
+          <a:xfrm>
+            <a:off x="4434840" y="1069848"/>
+            <a:ext cx="3429000" cy="411480"/>
+          </a:xfrm>
+          <a:prstGeom prst="rect">
+            <a:avLst/>
+          </a:prstGeom>
+          <a:noFill/>
+        </p:spPr>
+        <p:txBody>
+          <a:bodyPr wrap="none">
+            <a:spAutoFit/>
+          </a:bodyPr>
+          <a:lstStyle/>
+          <a:p>
+            <a:r>
+              <a:rPr sz="1300" b="1">
+                <a:solidFill>
+                  <a:srgbClr val="F59E0B"/>
+                </a:solidFill>
+              </a:rPr>
+              <a:t>📄 Compliance Docs</a:t>
+            </a:r>
+          </a:p>
+        </p:txBody>
+      </p:sp>
+      <p:sp>
+        <p:nvSpPr>
+          <p:cNvPr id="13" name="TextBox 12"/>
+          <p:cNvSpPr txBox="1"/>
+          <p:nvPr/>
+        </p:nvSpPr>
+        <p:spPr>
+          <a:xfrm>
+            <a:off x="4434840" y="1463040"/>
+            <a:ext cx="1463040" cy="640080"/>
+          </a:xfrm>
+          <a:prstGeom prst="rect">
+            <a:avLst/>
+          </a:prstGeom>
+          <a:noFill/>
+        </p:spPr>
+        <p:txBody>
+          <a:bodyPr wrap="none">
+            <a:spAutoFit/>
+          </a:bodyPr>
+          <a:lstStyle/>
+          <a:p>
+            <a:r>
+              <a:rPr sz="2800" b="1">
+                <a:solidFill>
+                  <a:srgbClr val="FFFFFF"/>
+                </a:solidFill>
+              </a:rPr>
+              <a:t>OPEN</a:t>
+            </a:r>
+          </a:p>
+        </p:txBody>
+      </p:sp>
+      <p:sp>
+        <p:nvSpPr>
+          <p:cNvPr id="14" name="TextBox 13"/>
+          <p:cNvSpPr txBox="1"/>
+          <p:nvPr/>
+        </p:nvSpPr>
+        <p:spPr>
+          <a:xfrm>
+            <a:off x="4434840" y="2039112"/>
+            <a:ext cx="3474720" cy="320040"/>
+          </a:xfrm>
+          <a:prstGeom prst="rect">
+            <a:avLst/>
+          </a:prstGeom>
+          <a:noFill/>
+        </p:spPr>
+        <p:txBody>
+          <a:bodyPr wrap="none">
+            <a:spAutoFit/>
+          </a:bodyPr>
+          <a:lstStyle/>
+          <a:p>
+            <a:r>
+              <a:rPr sz="1100" b="1">
+                <a:solidFill>
+                  <a:srgbClr val="10B981"/>
+                </a:solidFill>
+              </a:rPr>
+              <a:t>SOC2/HIPAA control mapping</a:t>
+            </a:r>
+          </a:p>
+        </p:txBody>
+      </p:sp>
+      <p:sp>
+        <p:nvSpPr>
+          <p:cNvPr id="15" name="TextBox 14"/>
+          <p:cNvSpPr txBox="1"/>
+          <p:nvPr/>
+        </p:nvSpPr>
+        <p:spPr>
+          <a:xfrm>
+            <a:off x="4434840" y="2350008"/>
+            <a:ext cx="3474720" cy="1051560"/>
+          </a:xfrm>
+          <a:prstGeom prst="rect">
+            <a:avLst/>
+          </a:prstGeom>
+          <a:noFill/>
+        </p:spPr>
+        <p:txBody>
+          <a:bodyPr wrap="square">
+            <a:spAutoFit/>
+          </a:bodyPr>
+          <a:lstStyle/>
+          <a:p>
+            <a:r>
+              <a:rPr sz="950" b="0">
+                <a:solidFill>
+                  <a:srgbClr val="CBD5E1"/>
+                </a:solidFill>
+              </a:rPr>
+              <a:t>Existing SSO, audit logging, RBAC, and rate limiting already satisfy many controls Lyzr markets as certifications — needs to be written up, not built.</a:t>
+            </a:r>
+          </a:p>
+        </p:txBody>
+      </p:sp>
+      <p:sp>
+        <p:nvSpPr>
+          <p:cNvPr id="16" name="Rectangle 15"/>
+          <p:cNvSpPr/>
+          <p:nvPr/>
+        </p:nvSpPr>
+        <p:spPr>
+          <a:xfrm>
+            <a:off x="8229600" y="960120"/>
+            <a:ext cx="3703320" cy="2514600"/>
+          </a:xfrm>
+          <a:prstGeom prst="rect">
+            <a:avLst/>
+          </a:prstGeom>
+          <a:solidFill>
+            <a:srgbClr val="1E2A45"/>
+          </a:solidFill>
+          <a:ln>
+            <a:noFill/>
+          </a:ln>
+          <a:effectLst/>
+        </p:spPr>
+        <p:style>
+          <a:lnRef idx="1">
+            <a:schemeClr val="accent1"/>
+          </a:lnRef>
+          <a:fillRef idx="3">
+            <a:schemeClr val="accent1"/>
+          </a:fillRef>
+          <a:effectRef idx="2">
+            <a:schemeClr val="accent1"/>
+          </a:effectRef>
+          <a:fontRef idx="minor">
+            <a:schemeClr val="lt1"/>
+          </a:fontRef>
+        </p:style>
+        <p:txBody>
+          <a:bodyPr rtlCol="0" anchor="ctr"/>
+          <a:lstStyle/>
+          <a:p>
+            <a:pPr algn="ctr"/>
+          </a:p>
+        </p:txBody>
+      </p:sp>
+      <p:sp>
+        <p:nvSpPr>
+          <p:cNvPr id="17" name="TextBox 16"/>
+          <p:cNvSpPr txBox="1"/>
+          <p:nvPr/>
+        </p:nvSpPr>
+        <p:spPr>
+          <a:xfrm>
+            <a:off x="8366760" y="1069848"/>
+            <a:ext cx="3429000" cy="411480"/>
+          </a:xfrm>
+          <a:prstGeom prst="rect">
+            <a:avLst/>
+          </a:prstGeom>
+          <a:noFill/>
+        </p:spPr>
+        <p:txBody>
+          <a:bodyPr wrap="none">
+            <a:spAutoFit/>
+          </a:bodyPr>
+          <a:lstStyle/>
+          <a:p>
+            <a:r>
+              <a:rPr sz="1300" b="1">
+                <a:solidFill>
+                  <a:srgbClr val="606EF5"/>
+                </a:solidFill>
+              </a:rPr>
+              <a:t>🗄️ Vector Store Choice</a:t>
+            </a:r>
+          </a:p>
+        </p:txBody>
+      </p:sp>
+      <p:sp>
+        <p:nvSpPr>
+          <p:cNvPr id="18" name="TextBox 17"/>
+          <p:cNvSpPr txBox="1"/>
+          <p:nvPr/>
+        </p:nvSpPr>
+        <p:spPr>
+          <a:xfrm>
+            <a:off x="8366760" y="1463040"/>
+            <a:ext cx="1463040" cy="640080"/>
+          </a:xfrm>
+          <a:prstGeom prst="rect">
+            <a:avLst/>
+          </a:prstGeom>
+          <a:noFill/>
+        </p:spPr>
+        <p:txBody>
+          <a:bodyPr wrap="none">
+            <a:spAutoFit/>
+          </a:bodyPr>
+          <a:lstStyle/>
+          <a:p>
+            <a:r>
+              <a:rPr sz="2800" b="1">
+                <a:solidFill>
+                  <a:srgbClr val="FFFFFF"/>
+                </a:solidFill>
+              </a:rPr>
+              <a:t>OPEN</a:t>
+            </a:r>
+          </a:p>
+        </p:txBody>
+      </p:sp>
+      <p:sp>
+        <p:nvSpPr>
+          <p:cNvPr id="19" name="TextBox 18"/>
+          <p:cNvSpPr txBox="1"/>
+          <p:nvPr/>
+        </p:nvSpPr>
+        <p:spPr>
+          <a:xfrm>
+            <a:off x="8366760" y="2039112"/>
+            <a:ext cx="3474720" cy="320040"/>
+          </a:xfrm>
+          <a:prstGeom prst="rect">
+            <a:avLst/>
+          </a:prstGeom>
+          <a:noFill/>
+        </p:spPr>
+        <p:txBody>
+          <a:bodyPr wrap="none">
+            <a:spAutoFit/>
+          </a:bodyPr>
+          <a:lstStyle/>
+          <a:p>
+            <a:r>
+              <a:rPr sz="1100" b="1">
+                <a:solidFill>
+                  <a:srgbClr val="10B981"/>
+                </a:solidFill>
+              </a:rPr>
+              <a:t>FAISS-only today</a:t>
+            </a:r>
+          </a:p>
+        </p:txBody>
+      </p:sp>
+      <p:sp>
+        <p:nvSpPr>
+          <p:cNvPr id="20" name="TextBox 19"/>
+          <p:cNvSpPr txBox="1"/>
+          <p:nvPr/>
+        </p:nvSpPr>
+        <p:spPr>
+          <a:xfrm>
+            <a:off x="8366760" y="2350008"/>
+            <a:ext cx="3474720" cy="1051560"/>
+          </a:xfrm>
+          <a:prstGeom prst="rect">
+            <a:avLst/>
+          </a:prstGeom>
+          <a:noFill/>
+        </p:spPr>
+        <p:txBody>
+          <a:bodyPr wrap="square">
+            <a:spAutoFit/>
+          </a:bodyPr>
+          <a:lstStyle/>
+          <a:p>
+            <a:r>
+              <a:rPr sz="950" b="0">
+                <a:solidFill>
+                  <a:srgbClr val="CBD5E1"/>
+                </a:solidFill>
+              </a:rPr>
+              <a:t>Lyzr offers Weaviate/managed vector store options for scale-out RAG. AgentForge is FAISS-only — relevant once RAG corpora grow beyond single-instance scale.</a:t>
+            </a:r>
+          </a:p>
+        </p:txBody>
+      </p:sp>
+      <p:sp>
+        <p:nvSpPr>
+          <p:cNvPr id="21" name="Rectangle 20"/>
+          <p:cNvSpPr/>
+          <p:nvPr/>
+        </p:nvSpPr>
+        <p:spPr>
+          <a:xfrm>
+            <a:off x="365760" y="3657600"/>
+            <a:ext cx="3703320" cy="2514600"/>
+          </a:xfrm>
+          <a:prstGeom prst="rect">
+            <a:avLst/>
+          </a:prstGeom>
+          <a:solidFill>
+            <a:srgbClr val="1E2A45"/>
+          </a:solidFill>
+          <a:ln>
+            <a:noFill/>
+          </a:ln>
+          <a:effectLst/>
+        </p:spPr>
+        <p:style>
+          <a:lnRef idx="1">
+            <a:schemeClr val="accent1"/>
+          </a:lnRef>
+          <a:fillRef idx="3">
+            <a:schemeClr val="accent1"/>
+          </a:fillRef>
+          <a:effectRef idx="2">
+            <a:schemeClr val="accent1"/>
+          </a:effectRef>
+          <a:fontRef idx="minor">
+            <a:schemeClr val="lt1"/>
+          </a:fontRef>
+        </p:style>
+        <p:txBody>
+          <a:bodyPr rtlCol="0" anchor="ctr"/>
+          <a:lstStyle/>
+          <a:p>
+            <a:pPr algn="ctr"/>
+          </a:p>
+        </p:txBody>
+      </p:sp>
+      <p:sp>
+        <p:nvSpPr>
+          <p:cNvPr id="22" name="TextBox 21"/>
+          <p:cNvSpPr txBox="1"/>
+          <p:nvPr/>
+        </p:nvSpPr>
+        <p:spPr>
+          <a:xfrm>
+            <a:off x="502920" y="3767328"/>
+            <a:ext cx="3429000" cy="411480"/>
+          </a:xfrm>
+          <a:prstGeom prst="rect">
+            <a:avLst/>
+          </a:prstGeom>
+          <a:noFill/>
+        </p:spPr>
+        <p:txBody>
+          <a:bodyPr wrap="none">
+            <a:spAutoFit/>
+          </a:bodyPr>
+          <a:lstStyle/>
+          <a:p>
+            <a:r>
+              <a:rPr sz="1300" b="1">
+                <a:solidFill>
+                  <a:srgbClr val="DC2626"/>
+                </a:solidFill>
+              </a:rPr>
+              <a:t>🛍️ Marketplace Audit</a:t>
+            </a:r>
+          </a:p>
+        </p:txBody>
+      </p:sp>
+      <p:sp>
+        <p:nvSpPr>
+          <p:cNvPr id="23" name="TextBox 22"/>
+          <p:cNvSpPr txBox="1"/>
+          <p:nvPr/>
+        </p:nvSpPr>
+        <p:spPr>
+          <a:xfrm>
+            <a:off x="502920" y="4160520"/>
+            <a:ext cx="1463040" cy="640080"/>
+          </a:xfrm>
+          <a:prstGeom prst="rect">
+            <a:avLst/>
+          </a:prstGeom>
+          <a:noFill/>
+        </p:spPr>
+        <p:txBody>
+          <a:bodyPr wrap="none">
+            <a:spAutoFit/>
+          </a:bodyPr>
+          <a:lstStyle/>
+          <a:p>
+            <a:r>
+              <a:rPr sz="2800" b="1">
+                <a:solidFill>
+                  <a:srgbClr val="FFFFFF"/>
+                </a:solidFill>
+              </a:rPr>
+              <a:t>OPEN</a:t>
+            </a:r>
+          </a:p>
+        </p:txBody>
+      </p:sp>
+      <p:sp>
+        <p:nvSpPr>
+          <p:cNvPr id="24" name="TextBox 23"/>
+          <p:cNvSpPr txBox="1"/>
+          <p:nvPr/>
+        </p:nvSpPr>
+        <p:spPr>
+          <a:xfrm>
+            <a:off x="502920" y="4736592"/>
+            <a:ext cx="3474720" cy="320040"/>
+          </a:xfrm>
+          <a:prstGeom prst="rect">
+            <a:avLst/>
+          </a:prstGeom>
+          <a:noFill/>
+        </p:spPr>
+        <p:txBody>
+          <a:bodyPr wrap="none">
+            <a:spAutoFit/>
+          </a:bodyPr>
+          <a:lstStyle/>
+          <a:p>
+            <a:r>
+              <a:rPr sz="1100" b="1">
+                <a:solidFill>
+                  <a:srgbClr val="10B981"/>
+                </a:solidFill>
+              </a:rPr>
+              <a:t>Template-breadth parity</a:t>
+            </a:r>
+          </a:p>
+        </p:txBody>
+      </p:sp>
+      <p:sp>
+        <p:nvSpPr>
+          <p:cNvPr id="25" name="TextBox 24"/>
+          <p:cNvSpPr txBox="1"/>
+          <p:nvPr/>
+        </p:nvSpPr>
+        <p:spPr>
+          <a:xfrm>
+            <a:off x="502920" y="5047488"/>
+            <a:ext cx="3474720" cy="1051560"/>
+          </a:xfrm>
+          <a:prstGeom prst="rect">
+            <a:avLst/>
+          </a:prstGeom>
+          <a:noFill/>
+        </p:spPr>
+        <p:txBody>
+          <a:bodyPr wrap="square">
+            <a:spAutoFit/>
+          </a:bodyPr>
+          <a:lstStyle/>
+          <a:p>
+            <a:r>
+              <a:rPr sz="950" b="0">
+                <a:solidFill>
+                  <a:srgbClr val="CBD5E1"/>
+                </a:solidFill>
+              </a:rPr>
+              <a:t>AgentForge's Marketplace page already exists with integration cards — needs a breadth audit against Lyzr's Agent Marketplace to confirm parity, not necessarily new code.</a:t>
+            </a:r>
+          </a:p>
+        </p:txBody>
+      </p:sp>
+      <p:sp>
+        <p:nvSpPr>
+          <p:cNvPr id="26" name="Rectangle 25"/>
+          <p:cNvSpPr/>
+          <p:nvPr/>
+        </p:nvSpPr>
+        <p:spPr>
+          <a:xfrm>
+            <a:off x="4297680" y="3657600"/>
+            <a:ext cx="3703320" cy="2514600"/>
+          </a:xfrm>
+          <a:prstGeom prst="rect">
+            <a:avLst/>
+          </a:prstGeom>
+          <a:solidFill>
+            <a:srgbClr val="1E2A45"/>
+          </a:solidFill>
+          <a:ln>
+            <a:noFill/>
+          </a:ln>
+          <a:effectLst/>
+        </p:spPr>
+        <p:style>
+          <a:lnRef idx="1">
+            <a:schemeClr val="accent1"/>
+          </a:lnRef>
+          <a:fillRef idx="3">
+            <a:schemeClr val="accent1"/>
+          </a:fillRef>
+          <a:effectRef idx="2">
+            <a:schemeClr val="accent1"/>
+          </a:effectRef>
+          <a:fontRef idx="minor">
+            <a:schemeClr val="lt1"/>
+          </a:fontRef>
+        </p:style>
+        <p:txBody>
+          <a:bodyPr rtlCol="0" anchor="ctr"/>
+          <a:lstStyle/>
+          <a:p>
+            <a:pPr algn="ctr"/>
+          </a:p>
+        </p:txBody>
+      </p:sp>
+      <p:sp>
+        <p:nvSpPr>
+          <p:cNvPr id="27" name="TextBox 26"/>
+          <p:cNvSpPr txBox="1"/>
+          <p:nvPr/>
+        </p:nvSpPr>
+        <p:spPr>
+          <a:xfrm>
+            <a:off x="4434840" y="3767328"/>
+            <a:ext cx="3429000" cy="411480"/>
+          </a:xfrm>
+          <a:prstGeom prst="rect">
+            <a:avLst/>
+          </a:prstGeom>
+          <a:noFill/>
+        </p:spPr>
+        <p:txBody>
+          <a:bodyPr wrap="none">
+            <a:spAutoFit/>
+          </a:bodyPr>
+          <a:lstStyle/>
+          <a:p>
+            <a:r>
+              <a:rPr sz="1300" b="1">
+                <a:solidFill>
+                  <a:srgbClr val="0E79B2"/>
+                </a:solidFill>
+              </a:rPr>
+              <a:t>🎯 This Cycle's Priority</a:t>
+            </a:r>
+          </a:p>
+        </p:txBody>
+      </p:sp>
+      <p:sp>
+        <p:nvSpPr>
+          <p:cNvPr id="28" name="TextBox 27"/>
+          <p:cNvSpPr txBox="1"/>
+          <p:nvPr/>
+        </p:nvSpPr>
+        <p:spPr>
+          <a:xfrm>
+            <a:off x="4434840" y="4160520"/>
+            <a:ext cx="1463040" cy="640080"/>
+          </a:xfrm>
+          <a:prstGeom prst="rect">
+            <a:avLst/>
+          </a:prstGeom>
+          <a:noFill/>
+        </p:spPr>
+        <p:txBody>
+          <a:bodyPr wrap="none">
+            <a:spAutoFit/>
+          </a:bodyPr>
+          <a:lstStyle/>
+          <a:p>
+            <a:r>
+              <a:rPr sz="2800" b="1">
+                <a:solidFill>
+                  <a:srgbClr val="FFFFFF"/>
+                </a:solidFill>
+              </a:rPr>
+              <a:t>1 of 4</a:t>
+            </a:r>
+          </a:p>
+        </p:txBody>
+      </p:sp>
+      <p:sp>
+        <p:nvSpPr>
+          <p:cNvPr id="29" name="TextBox 28"/>
+          <p:cNvSpPr txBox="1"/>
+          <p:nvPr/>
+        </p:nvSpPr>
+        <p:spPr>
+          <a:xfrm>
+            <a:off x="4434840" y="4736592"/>
+            <a:ext cx="3474720" cy="320040"/>
+          </a:xfrm>
+          <a:prstGeom prst="rect">
+            <a:avLst/>
+          </a:prstGeom>
+          <a:noFill/>
+        </p:spPr>
+        <p:txBody>
+          <a:bodyPr wrap="none">
+            <a:spAutoFit/>
+          </a:bodyPr>
+          <a:lstStyle/>
+          <a:p>
+            <a:r>
+              <a:rPr sz="1100" b="1">
+                <a:solidFill>
+                  <a:srgbClr val="10B981"/>
+                </a:solidFill>
+              </a:rPr>
+              <a:t>Manager Agents shipped first</a:t>
+            </a:r>
+          </a:p>
+        </p:txBody>
+      </p:sp>
+      <p:sp>
+        <p:nvSpPr>
+          <p:cNvPr id="30" name="TextBox 29"/>
+          <p:cNvSpPr txBox="1"/>
+          <p:nvPr/>
+        </p:nvSpPr>
+        <p:spPr>
+          <a:xfrm>
+            <a:off x="4434840" y="5047488"/>
+            <a:ext cx="3474720" cy="1051560"/>
+          </a:xfrm>
+          <a:prstGeom prst="rect">
+            <a:avLst/>
+          </a:prstGeom>
+          <a:noFill/>
+        </p:spPr>
+        <p:txBody>
+          <a:bodyPr wrap="square">
+            <a:spAutoFit/>
+          </a:bodyPr>
+          <a:lstStyle/>
+          <a:p>
+            <a:r>
+              <a:rPr sz="950" b="0">
+                <a:solidFill>
+                  <a:srgbClr val="CBD5E1"/>
+                </a:solidFill>
+              </a:rPr>
+              <a:t>Chosen as the largest, highest-value gap — directly matches Lyzr's headline "Manager Agents" positioning and required the most engineering (vs. the other 3, which are largely docs/audit work).</a:t>
+            </a:r>
+          </a:p>
+        </p:txBody>
+      </p:sp>
+      <p:sp>
+        <p:nvSpPr>
+          <p:cNvPr id="31" name="Rectangle 30"/>
+          <p:cNvSpPr/>
+          <p:nvPr/>
+        </p:nvSpPr>
+        <p:spPr>
+          <a:xfrm>
+            <a:off x="8229600" y="3657600"/>
+            <a:ext cx="3703320" cy="2514600"/>
+          </a:xfrm>
+          <a:prstGeom prst="rect">
+            <a:avLst/>
+          </a:prstGeom>
+          <a:solidFill>
+            <a:srgbClr val="1E2A45"/>
+          </a:solidFill>
+          <a:ln>
+            <a:noFill/>
+          </a:ln>
+          <a:effectLst/>
+        </p:spPr>
+        <p:style>
+          <a:lnRef idx="1">
+            <a:schemeClr val="accent1"/>
+          </a:lnRef>
+          <a:fillRef idx="3">
+            <a:schemeClr val="accent1"/>
+          </a:fillRef>
+          <a:effectRef idx="2">
+            <a:schemeClr val="accent1"/>
+          </a:effectRef>
+          <a:fontRef idx="minor">
+            <a:schemeClr val="lt1"/>
+          </a:fontRef>
+        </p:style>
+        <p:txBody>
+          <a:bodyPr rtlCol="0" anchor="ctr"/>
+          <a:lstStyle/>
+          <a:p>
+            <a:pPr algn="ctr"/>
+          </a:p>
+        </p:txBody>
+      </p:sp>
+      <p:sp>
+        <p:nvSpPr>
+          <p:cNvPr id="32" name="TextBox 31"/>
+          <p:cNvSpPr txBox="1"/>
+          <p:nvPr/>
+        </p:nvSpPr>
+        <p:spPr>
+          <a:xfrm>
+            <a:off x="8366760" y="3767328"/>
+            <a:ext cx="3429000" cy="411480"/>
+          </a:xfrm>
+          <a:prstGeom prst="rect">
+            <a:avLst/>
+          </a:prstGeom>
+          <a:noFill/>
+        </p:spPr>
+        <p:txBody>
+          <a:bodyPr wrap="none">
+            <a:spAutoFit/>
+          </a:bodyPr>
+          <a:lstStyle/>
+          <a:p>
+            <a:r>
+              <a:rPr sz="1300" b="1">
+                <a:solidFill>
+                  <a:srgbClr val="F59E0B"/>
+                </a:solidFill>
+              </a:rPr>
+              <a:t>📌 Next Recommended</a:t>
+            </a:r>
+          </a:p>
+        </p:txBody>
+      </p:sp>
+      <p:sp>
+        <p:nvSpPr>
+          <p:cNvPr id="33" name="TextBox 32"/>
+          <p:cNvSpPr txBox="1"/>
+          <p:nvPr/>
+        </p:nvSpPr>
+        <p:spPr>
+          <a:xfrm>
+            <a:off x="8366760" y="4160520"/>
+            <a:ext cx="1463040" cy="640080"/>
+          </a:xfrm>
+          <a:prstGeom prst="rect">
+            <a:avLst/>
+          </a:prstGeom>
+          <a:noFill/>
+        </p:spPr>
+        <p:txBody>
+          <a:bodyPr wrap="none">
+            <a:spAutoFit/>
+          </a:bodyPr>
+          <a:lstStyle/>
+          <a:p>
+            <a:r>
+              <a:rPr sz="2800" b="1">
+                <a:solidFill>
+                  <a:srgbClr val="FFFFFF"/>
+                </a:solidFill>
+              </a:rPr>
+              <a:t>Compliance</a:t>
+            </a:r>
+          </a:p>
+        </p:txBody>
+      </p:sp>
+      <p:sp>
+        <p:nvSpPr>
+          <p:cNvPr id="34" name="TextBox 33"/>
+          <p:cNvSpPr txBox="1"/>
+          <p:nvPr/>
+        </p:nvSpPr>
+        <p:spPr>
+          <a:xfrm>
+            <a:off x="8366760" y="4736592"/>
+            <a:ext cx="3474720" cy="320040"/>
+          </a:xfrm>
+          <a:prstGeom prst="rect">
+            <a:avLst/>
+          </a:prstGeom>
+          <a:noFill/>
+        </p:spPr>
+        <p:txBody>
+          <a:bodyPr wrap="none">
+            <a:spAutoFit/>
+          </a:bodyPr>
+          <a:lstStyle/>
+          <a:p>
+            <a:r>
+              <a:rPr sz="1100" b="1">
+                <a:solidFill>
+                  <a:srgbClr val="10B981"/>
+                </a:solidFill>
+              </a:rPr>
+              <a:t>Cheapest next win</a:t>
+            </a:r>
+          </a:p>
+        </p:txBody>
+      </p:sp>
+      <p:sp>
+        <p:nvSpPr>
+          <p:cNvPr id="35" name="TextBox 34"/>
+          <p:cNvSpPr txBox="1"/>
+          <p:nvPr/>
+        </p:nvSpPr>
+        <p:spPr>
+          <a:xfrm>
+            <a:off x="8366760" y="5047488"/>
+            <a:ext cx="3474720" cy="1051560"/>
+          </a:xfrm>
+          <a:prstGeom prst="rect">
+            <a:avLst/>
+          </a:prstGeom>
+          <a:noFill/>
+        </p:spPr>
+        <p:txBody>
+          <a:bodyPr wrap="square">
+            <a:spAutoFit/>
+          </a:bodyPr>
+          <a:lstStyle/>
+          <a:p>
+            <a:r>
+              <a:rPr sz="950" b="0">
+                <a:solidFill>
+                  <a:srgbClr val="CBD5E1"/>
+                </a:solidFill>
+              </a:rPr>
+              <a:t>Compliance documentation requires zero new code — just mapping what already exists (SSO, audit, RBAC, rate limiting) to SOC2/HIPAA control language. Fastest ROI of the 3 remaining items.</a:t>
+            </a:r>
+          </a:p>
+        </p:txBody>
+      </p:sp>
+      <p:sp>
+        <p:nvSpPr>
+          <p:cNvPr id="36" name="TextBox 35"/>
+          <p:cNvSpPr txBox="1"/>
+          <p:nvPr/>
+        </p:nvSpPr>
+        <p:spPr>
+          <a:xfrm>
+            <a:off x="11640312" y="6492240"/>
             <a:ext cx="457200" cy="320040"/>
           </a:xfrm>
           <a:prstGeom prst="rect">
@@ -35239,89 +37248,7 @@
                   <a:srgbClr val="CBD5E1"/>
                 </a:solidFill>
               </a:rPr>
-              <a:t>34</a:t>
-            </a:r>
-          </a:p>
-        </p:txBody>
-      </p:sp>
-      <p:pic>
-        <p:nvPicPr>
-          <p:cNvPr id="6" name="Picture 5" descr="06_builder_run_dialog.png"/>
-          <p:cNvPicPr>
-            <a:picLocks noChangeAspect="1"/>
-          </p:cNvPicPr>
-          <p:nvPr/>
-        </p:nvPicPr>
-        <p:blipFill>
-          <a:blip r:embed="rId2"/>
-          <a:stretch>
-            <a:fillRect/>
-          </a:stretch>
-        </p:blipFill>
-        <p:spPr>
-          <a:xfrm>
-            <a:off x="2651760" y="1051560"/>
-            <a:ext cx="6858000" cy="3857625"/>
-          </a:xfrm>
-          <a:prstGeom prst="rect">
-            <a:avLst/>
-          </a:prstGeom>
-          <a:ln w="12700">
-            <a:solidFill>
-              <a:srgbClr val="334155"/>
-            </a:solidFill>
-          </a:ln>
-        </p:spPr>
-      </p:pic>
-      <p:sp>
-        <p:nvSpPr>
-          <p:cNvPr id="7" name="TextBox 6"/>
-          <p:cNvSpPr txBox="1"/>
-          <p:nvPr/>
-        </p:nvSpPr>
-        <p:spPr>
-          <a:xfrm>
-            <a:off x="457200" y="5440680"/>
-            <a:ext cx="11247120" cy="1188720"/>
-          </a:xfrm>
-          <a:prstGeom prst="rect">
-            <a:avLst/>
-          </a:prstGeom>
-          <a:noFill/>
-        </p:spPr>
-        <p:txBody>
-          <a:bodyPr wrap="square">
-            <a:spAutoFit/>
-          </a:bodyPr>
-          <a:lstStyle/>
-          <a:p>
-            <a:pPr>
-              <a:spcAft>
-                <a:spcPts val="400"/>
-              </a:spcAft>
-            </a:pPr>
-            <a:r>
-              <a:rPr sz="1100">
-                <a:solidFill>
-                  <a:srgbClr val="CBD5E1"/>
-                </a:solidFill>
-              </a:rPr>
-              <a:t>① Run — click Run, and an AI-suggested realistic example input is generated automatically; edit it or keep it, then Execute &amp; Save Trace to watch each node pulse green while running and stay green when done.</a:t>
-            </a:r>
-          </a:p>
-          <a:p>
-            <a:pPr>
-              <a:spcAft>
-                <a:spcPts val="400"/>
-              </a:spcAft>
-            </a:pPr>
-            <a:r>
-              <a:rPr sz="1100">
-                <a:solidFill>
-                  <a:srgbClr val="CBD5E1"/>
-                </a:solidFill>
-              </a:rPr>
-              <a:t>② Deploy — publish the workflow as a live, callable endpoint once you're happy with a run's trace in Workflow Runs / Observability.</a:t>
+              <a:t>33</a:t>
             </a:r>
           </a:p>
         </p:txBody>
@@ -35469,7 +37396,7 @@
                   <a:srgbClr val="FFFFFF"/>
                 </a:solidFill>
               </a:rPr>
-              <a:t>How To Use: Architect, Agent Studio &amp; Playground</a:t>
+              <a:t>How To Use: Visual Builder — Templates &amp; Auto-Build</a:t>
             </a:r>
           </a:p>
         </p:txBody>
@@ -35509,7 +37436,7 @@
       </p:sp>
       <p:pic>
         <p:nvPicPr>
-          <p:cNvPr id="7" name="Picture 6" descr="08_agent_studio.png"/>
+          <p:cNvPr id="6" name="Picture 5" descr="02_builder_templates.png"/>
           <p:cNvPicPr>
             <a:picLocks noChangeAspect="1"/>
           </p:cNvPicPr>
@@ -35523,7 +37450,7 @@
         </p:blipFill>
         <p:spPr>
           <a:xfrm>
-            <a:off x="6172200" y="1051560"/>
+            <a:off x="457200" y="1051560"/>
             <a:ext cx="5486400" cy="3086100"/>
           </a:xfrm>
           <a:prstGeom prst="rect">
@@ -35536,68 +37463,9 @@
           </a:ln>
         </p:spPr>
       </p:pic>
-      <p:sp>
-        <p:nvSpPr>
-          <p:cNvPr id="8" name="TextBox 7"/>
-          <p:cNvSpPr txBox="1"/>
-          <p:nvPr/>
-        </p:nvSpPr>
-        <p:spPr>
-          <a:xfrm>
-            <a:off x="457200" y="5440680"/>
-            <a:ext cx="11247120" cy="651460"/>
-          </a:xfrm>
-          <a:prstGeom prst="rect">
-            <a:avLst/>
-          </a:prstGeom>
-          <a:noFill/>
-        </p:spPr>
-        <p:txBody>
-          <a:bodyPr wrap="square">
-            <a:spAutoFit/>
-          </a:bodyPr>
-          <a:lstStyle/>
-          <a:p>
-            <a:pPr>
-              <a:spcAft>
-                <a:spcPts val="400"/>
-              </a:spcAft>
-            </a:pPr>
-            <a:r>
-              <a:rPr lang="en-US" sz="1100" dirty="0">
-                <a:solidFill>
-                  <a:srgbClr val="CBD5E1"/>
-                </a:solidFill>
-              </a:rPr>
-              <a:t>① Home — landing page with quick actions and recent activity; the fastest way back into any agent, project, or workflow you were last working on. </a:t>
-            </a:r>
-          </a:p>
-          <a:p>
-            <a:pPr>
-              <a:spcAft>
-                <a:spcPts val="400"/>
-              </a:spcAft>
-            </a:pPr>
-            <a:r>
-              <a:rPr sz="1100" dirty="0">
-                <a:solidFill>
-                  <a:srgbClr val="CBD5E1"/>
-                </a:solidFill>
-              </a:rPr>
-              <a:t>② Agent Studio — every saved agent lives here: Edit, Test, Deploy, Publish, or ask it something directly. Playground gives each agent its own chat with a one-click “Suggest” example-input button.</a:t>
-            </a:r>
-          </a:p>
-        </p:txBody>
-      </p:sp>
       <p:pic>
         <p:nvPicPr>
-          <p:cNvPr id="10" name="Picture 9" descr="11_home.png">
-            <a:extLst>
-              <a:ext uri="{FF2B5EF4-FFF2-40B4-BE49-F238E27FC236}">
-                <a16:creationId xmlns:a16="http://schemas.microsoft.com/office/drawing/2014/main" id="{961B9171-039C-BA53-D873-0BDC693AF21D}"/>
-              </a:ext>
-            </a:extLst>
-          </p:cNvPr>
+          <p:cNvPr id="7" name="Picture 6" descr="03_builder_autobuild.png"/>
           <p:cNvPicPr>
             <a:picLocks noChangeAspect="1"/>
           </p:cNvPicPr>
@@ -35611,7 +37479,7 @@
         </p:blipFill>
         <p:spPr>
           <a:xfrm>
-            <a:off x="457200" y="1051560"/>
+            <a:off x="6172200" y="1051560"/>
             <a:ext cx="5486400" cy="3086100"/>
           </a:xfrm>
           <a:prstGeom prst="rect">
@@ -35624,6 +37492,59 @@
           </a:ln>
         </p:spPr>
       </p:pic>
+      <p:sp>
+        <p:nvSpPr>
+          <p:cNvPr id="8" name="TextBox 7"/>
+          <p:cNvSpPr txBox="1"/>
+          <p:nvPr/>
+        </p:nvSpPr>
+        <p:spPr>
+          <a:xfrm>
+            <a:off x="457200" y="5440680"/>
+            <a:ext cx="11247120" cy="1188720"/>
+          </a:xfrm>
+          <a:prstGeom prst="rect">
+            <a:avLst/>
+          </a:prstGeom>
+          <a:noFill/>
+        </p:spPr>
+        <p:txBody>
+          <a:bodyPr wrap="square">
+            <a:spAutoFit/>
+          </a:bodyPr>
+          <a:lstStyle/>
+          <a:p>
+            <a:pPr>
+              <a:spcAft>
+                <a:spcPts val="400"/>
+              </a:spcAft>
+            </a:pPr>
+            <a:r>
+              <a:rPr sz="1100">
+                <a:solidFill>
+                  <a:srgbClr val="CBD5E1"/>
+                </a:solidFill>
+              </a:rPr>
+              <a:t>① Templates — pick from 40+ ready-made multi-agent pipelines across 10 categories (Architecture, Sales &amp; Marketing, Customer Support, and more) and load one straight onto the canvas.</a:t>
+            </a:r>
+          </a:p>
+          <a:p>
+            <a:pPr>
+              <a:spcAft>
+                <a:spcPts val="400"/>
+              </a:spcAft>
+            </a:pPr>
+            <a:r>
+              <a:rPr sz="1100">
+                <a:solidFill>
+                  <a:srgbClr val="CBD5E1"/>
+                </a:solidFill>
+              </a:rPr>
+              <a:t>② Auto-Build — describe your pipeline in plain English (“A customer support pipeline that classifies queries, routes to the right responder...”) and GPT-5.4-mini generates a 3–6 role-typed node graph automatically.</a:t>
+            </a:r>
+          </a:p>
+        </p:txBody>
+      </p:sp>
     </p:spTree>
   </p:cSld>
   <p:clrMapOvr>
@@ -35767,7 +37688,7 @@
                   <a:srgbClr val="FFFFFF"/>
                 </a:solidFill>
               </a:rPr>
-              <a:t>How To Use: Playground — Test Any Agent Live</a:t>
+              <a:t>How To Use: Visual Builder — Configure, Export &amp; Import</a:t>
             </a:r>
           </a:p>
         </p:txBody>
@@ -35805,62 +37726,9 @@
           </a:p>
         </p:txBody>
       </p:sp>
-      <p:sp>
-        <p:nvSpPr>
-          <p:cNvPr id="7" name="TextBox 6"/>
-          <p:cNvSpPr txBox="1"/>
-          <p:nvPr/>
-        </p:nvSpPr>
-        <p:spPr>
-          <a:xfrm>
-            <a:off x="457200" y="5440680"/>
-            <a:ext cx="11247120" cy="1188720"/>
-          </a:xfrm>
-          <a:prstGeom prst="rect">
-            <a:avLst/>
-          </a:prstGeom>
-          <a:noFill/>
-        </p:spPr>
-        <p:txBody>
-          <a:bodyPr wrap="square">
-            <a:spAutoFit/>
-          </a:bodyPr>
-          <a:lstStyle/>
-          <a:p>
-            <a:pPr>
-              <a:spcAft>
-                <a:spcPts val="400"/>
-              </a:spcAft>
-            </a:pPr>
-            <a:r>
-              <a:rPr sz="1100">
-                <a:solidFill>
-                  <a:srgbClr val="CBD5E1"/>
-                </a:solidFill>
-              </a:rPr>
-              <a:t>① Open any agent's Playground to see its System Prompt, Guardrails, Tools, and the exact Model it runs on (accurately resolved per agent — Local Model or Azure GPT-5.4-mini, not a stale label).</a:t>
-            </a:r>
-          </a:p>
-          <a:p>
-            <a:pPr>
-              <a:spcAft>
-                <a:spcPts val="400"/>
-              </a:spcAft>
-            </a:pPr>
-            <a:r>
-              <a:rPr sz="1100">
-                <a:solidFill>
-                  <a:srgbClr val="CBD5E1"/>
-                </a:solidFill>
-              </a:rPr>
-              <a:t>② Click Suggest for an AI-generated realistic example message tailored to that agent, or type your own — then Send to test it live and watch Session Stats (Total Runs, Avg ms) update.</a:t>
-            </a:r>
-          </a:p>
-        </p:txBody>
-      </p:sp>
       <p:pic>
         <p:nvPicPr>
-          <p:cNvPr id="8" name="Picture 7" descr="10_playground_suggest.png"/>
+          <p:cNvPr id="6" name="Picture 5" descr="04_builder_agent_config.png"/>
           <p:cNvPicPr>
             <a:picLocks noChangeAspect="1"/>
           </p:cNvPicPr>
@@ -35874,8 +37742,8 @@
         </p:blipFill>
         <p:spPr>
           <a:xfrm>
-            <a:off x="2651760" y="1051560"/>
-            <a:ext cx="6858000" cy="3857625"/>
+            <a:off x="457200" y="1051560"/>
+            <a:ext cx="5486400" cy="3086100"/>
           </a:xfrm>
           <a:prstGeom prst="rect">
             <a:avLst/>
@@ -35887,6 +37755,88 @@
           </a:ln>
         </p:spPr>
       </p:pic>
+      <p:pic>
+        <p:nvPicPr>
+          <p:cNvPr id="7" name="Picture 6" descr="05_builder_export_code.png"/>
+          <p:cNvPicPr>
+            <a:picLocks noChangeAspect="1"/>
+          </p:cNvPicPr>
+          <p:nvPr/>
+        </p:nvPicPr>
+        <p:blipFill>
+          <a:blip r:embed="rId3"/>
+          <a:stretch>
+            <a:fillRect/>
+          </a:stretch>
+        </p:blipFill>
+        <p:spPr>
+          <a:xfrm>
+            <a:off x="6172200" y="1051560"/>
+            <a:ext cx="5486400" cy="3086100"/>
+          </a:xfrm>
+          <a:prstGeom prst="rect">
+            <a:avLst/>
+          </a:prstGeom>
+          <a:ln w="12700">
+            <a:solidFill>
+              <a:srgbClr val="334155"/>
+            </a:solidFill>
+          </a:ln>
+        </p:spPr>
+      </p:pic>
+      <p:sp>
+        <p:nvSpPr>
+          <p:cNvPr id="8" name="TextBox 7"/>
+          <p:cNvSpPr txBox="1"/>
+          <p:nvPr/>
+        </p:nvSpPr>
+        <p:spPr>
+          <a:xfrm>
+            <a:off x="457200" y="5440680"/>
+            <a:ext cx="11247120" cy="1188720"/>
+          </a:xfrm>
+          <a:prstGeom prst="rect">
+            <a:avLst/>
+          </a:prstGeom>
+          <a:noFill/>
+        </p:spPr>
+        <p:txBody>
+          <a:bodyPr wrap="square">
+            <a:spAutoFit/>
+          </a:bodyPr>
+          <a:lstStyle/>
+          <a:p>
+            <a:pPr>
+              <a:spcAft>
+                <a:spcPts val="400"/>
+              </a:spcAft>
+            </a:pPr>
+            <a:r>
+              <a:rPr sz="1100">
+                <a:solidFill>
+                  <a:srgbClr val="CBD5E1"/>
+                </a:solidFill>
+              </a:rPr>
+              <a:t>① Configure — click any node to set its Role, System Prompt, Model (Local Model or Azure GPT-5.4-mini, per agent), Tools, and always-on Guardrails, then Save Agent.</a:t>
+            </a:r>
+          </a:p>
+          <a:p>
+            <a:pPr>
+              <a:spcAft>
+                <a:spcPts val="400"/>
+              </a:spcAft>
+            </a:pPr>
+            <a:r>
+              <a:rPr sz="1100">
+                <a:solidFill>
+                  <a:srgbClr val="CBD5E1"/>
+                </a:solidFill>
+              </a:rPr>
+              <a:t>② Export / Import — Export Code generates a faithful Python script with the same execution logic as the live engine; Export JSON / Import JSON give a lossless, round-trippable workflow backup.</a:t>
+            </a:r>
+          </a:p>
+        </p:txBody>
+      </p:sp>
     </p:spTree>
   </p:cSld>
   <p:clrMapOvr>
@@ -36011,42 +37961,26 @@
         <p:spPr>
           <a:xfrm>
             <a:off x="457200" y="274320"/>
-            <a:ext cx="10972800" cy="492443"/>
-          </a:xfrm>
-          <a:prstGeom prst="rect">
-            <a:avLst/>
-          </a:prstGeom>
-          <a:noFill/>
-        </p:spPr>
-        <p:txBody>
-          <a:bodyPr wrap="square">
-            <a:spAutoFit/>
-          </a:bodyPr>
-          <a:lstStyle/>
-          <a:p>
-            <a:r>
-              <a:rPr sz="2600" b="1" dirty="0">
+            <a:ext cx="10972800" cy="548640"/>
+          </a:xfrm>
+          <a:prstGeom prst="rect">
+            <a:avLst/>
+          </a:prstGeom>
+          <a:noFill/>
+        </p:spPr>
+        <p:txBody>
+          <a:bodyPr wrap="square">
+            <a:spAutoFit/>
+          </a:bodyPr>
+          <a:lstStyle/>
+          <a:p>
+            <a:r>
+              <a:rPr sz="2600" b="1">
                 <a:solidFill>
                   <a:srgbClr val="FFFFFF"/>
                 </a:solidFill>
               </a:rPr>
-              <a:t>How To Use: </a:t>
-            </a:r>
-            <a:r>
-              <a:rPr lang="en-US" sz="2600" b="1" dirty="0">
-                <a:solidFill>
-                  <a:srgbClr val="FFFFFF"/>
-                </a:solidFill>
-              </a:rPr>
-              <a:t>Architect</a:t>
-            </a:r>
-            <a:r>
-              <a:rPr sz="2600" b="1" dirty="0">
-                <a:solidFill>
-                  <a:srgbClr val="FFFFFF"/>
-                </a:solidFill>
-              </a:rPr>
-              <a:t> &amp; Prompt Library</a:t>
+              <a:t>How To Use: Visual Builder — Run &amp; Deploy</a:t>
             </a:r>
           </a:p>
         </p:txBody>
@@ -36086,7 +38020,7 @@
       </p:sp>
       <p:pic>
         <p:nvPicPr>
-          <p:cNvPr id="7" name="Picture 6" descr="12_prompt_library.png"/>
+          <p:cNvPr id="6" name="Picture 5" descr="06_builder_run_dialog.png"/>
           <p:cNvPicPr>
             <a:picLocks noChangeAspect="1"/>
           </p:cNvPicPr>
@@ -36100,8 +38034,8 @@
         </p:blipFill>
         <p:spPr>
           <a:xfrm>
-            <a:off x="6172200" y="1051560"/>
-            <a:ext cx="5486400" cy="3086100"/>
+            <a:off x="2651760" y="1051560"/>
+            <a:ext cx="6858000" cy="3857625"/>
           </a:xfrm>
           <a:prstGeom prst="rect">
             <a:avLst/>
@@ -36115,14 +38049,14 @@
       </p:pic>
       <p:sp>
         <p:nvSpPr>
-          <p:cNvPr id="8" name="TextBox 7"/>
+          <p:cNvPr id="7" name="TextBox 6"/>
           <p:cNvSpPr txBox="1"/>
           <p:nvPr/>
         </p:nvSpPr>
         <p:spPr>
           <a:xfrm>
             <a:off x="457200" y="5440680"/>
-            <a:ext cx="11247120" cy="872034"/>
+            <a:ext cx="11247120" cy="1188720"/>
           </a:xfrm>
           <a:prstGeom prst="rect">
             <a:avLst/>
@@ -36141,12 +38075,12 @@
               </a:spcAft>
             </a:pPr>
             <a:r>
-              <a:rPr lang="en-US" sz="1100" dirty="0">
+              <a:rPr sz="1100">
                 <a:solidFill>
                   <a:srgbClr val="CBD5E1"/>
                 </a:solidFill>
               </a:rPr>
-              <a:t>① Architect — describe what you want to build in plain English; it asks clarifying questions, then generates a full Plan / Agents / App / Database, downloadable as a RAG Scaffold or Custom Code ZIP.</a:t>
+              <a:t>① Run — click Run, and an AI-suggested realistic example input is generated automatically; edit it or keep it, then Execute &amp; Save Trace to watch each node pulse green while running and stay green when done.</a:t>
             </a:r>
           </a:p>
           <a:p>
@@ -36155,64 +38089,17 @@
                 <a:spcPts val="400"/>
               </a:spcAft>
             </a:pPr>
-            <a:endParaRPr sz="1100" dirty="0">
-              <a:solidFill>
-                <a:srgbClr val="CBD5E1"/>
-              </a:solidFill>
-            </a:endParaRPr>
-          </a:p>
-          <a:p>
-            <a:pPr>
-              <a:spcAft>
-                <a:spcPts val="400"/>
-              </a:spcAft>
-            </a:pPr>
-            <a:r>
-              <a:rPr sz="1100" dirty="0">
+            <a:r>
+              <a:rPr sz="1100">
                 <a:solidFill>
                   <a:srgbClr val="CBD5E1"/>
                 </a:solidFill>
               </a:rPr>
-              <a:t>② Prompt Library — 46+ curated multi-agent prompts across 10 domains (Support, Sales, Legal, HR, Data, and more); search, preview, and copy straight into Architect or Agent Studio.</a:t>
-            </a:r>
-          </a:p>
-        </p:txBody>
-      </p:sp>
-      <p:pic>
-        <p:nvPicPr>
-          <p:cNvPr id="10" name="Picture 9" descr="07_architect.png">
-            <a:extLst>
-              <a:ext uri="{FF2B5EF4-FFF2-40B4-BE49-F238E27FC236}">
-                <a16:creationId xmlns:a16="http://schemas.microsoft.com/office/drawing/2014/main" id="{A6EA2B05-A44A-923C-6A12-9B1083B342D1}"/>
-              </a:ext>
-            </a:extLst>
-          </p:cNvPr>
-          <p:cNvPicPr>
-            <a:picLocks noChangeAspect="1"/>
-          </p:cNvPicPr>
-          <p:nvPr/>
-        </p:nvPicPr>
-        <p:blipFill>
-          <a:blip r:embed="rId3"/>
-          <a:stretch>
-            <a:fillRect/>
-          </a:stretch>
-        </p:blipFill>
-        <p:spPr>
-          <a:xfrm>
-            <a:off x="457200" y="1051560"/>
-            <a:ext cx="5486400" cy="3086100"/>
-          </a:xfrm>
-          <a:prstGeom prst="rect">
-            <a:avLst/>
-          </a:prstGeom>
-          <a:ln w="12700">
-            <a:solidFill>
-              <a:srgbClr val="334155"/>
-            </a:solidFill>
-          </a:ln>
-        </p:spPr>
-      </p:pic>
+              <a:t>② Deploy — publish the workflow as a live, callable endpoint once you're happy with a run's trace in Workflow Runs / Observability.</a:t>
+            </a:r>
+          </a:p>
+        </p:txBody>
+      </p:sp>
     </p:spTree>
   </p:cSld>
   <p:clrMapOvr>
@@ -36356,7 +38243,7 @@
                   <a:srgbClr val="FFFFFF"/>
                 </a:solidFill>
               </a:rPr>
-              <a:t>How To Use: Control Plane &amp; Audit Traceability</a:t>
+              <a:t>How To Use: Architect, Agent Studio &amp; Playground</a:t>
             </a:r>
           </a:p>
         </p:txBody>
@@ -36396,7 +38283,7 @@
       </p:sp>
       <p:pic>
         <p:nvPicPr>
-          <p:cNvPr id="6" name="Picture 5" descr="13_control_plane.png"/>
+          <p:cNvPr id="7" name="Picture 6" descr="08_agent_studio.png"/>
           <p:cNvPicPr>
             <a:picLocks noChangeAspect="1"/>
           </p:cNvPicPr>
@@ -36410,7 +38297,7 @@
         </p:blipFill>
         <p:spPr>
           <a:xfrm>
-            <a:off x="457200" y="1051560"/>
+            <a:off x="6172200" y="1051560"/>
             <a:ext cx="5486400" cy="3086100"/>
           </a:xfrm>
           <a:prstGeom prst="rect">
@@ -36423,9 +38310,68 @@
           </a:ln>
         </p:spPr>
       </p:pic>
+      <p:sp>
+        <p:nvSpPr>
+          <p:cNvPr id="8" name="TextBox 7"/>
+          <p:cNvSpPr txBox="1"/>
+          <p:nvPr/>
+        </p:nvSpPr>
+        <p:spPr>
+          <a:xfrm>
+            <a:off x="457200" y="5440680"/>
+            <a:ext cx="11247120" cy="651460"/>
+          </a:xfrm>
+          <a:prstGeom prst="rect">
+            <a:avLst/>
+          </a:prstGeom>
+          <a:noFill/>
+        </p:spPr>
+        <p:txBody>
+          <a:bodyPr wrap="square">
+            <a:spAutoFit/>
+          </a:bodyPr>
+          <a:lstStyle/>
+          <a:p>
+            <a:pPr>
+              <a:spcAft>
+                <a:spcPts val="400"/>
+              </a:spcAft>
+            </a:pPr>
+            <a:r>
+              <a:rPr lang="en-US" sz="1100" dirty="0">
+                <a:solidFill>
+                  <a:srgbClr val="CBD5E1"/>
+                </a:solidFill>
+              </a:rPr>
+              <a:t>① Home — landing page with quick actions and recent activity; the fastest way back into any agent, project, or workflow you were last working on. </a:t>
+            </a:r>
+          </a:p>
+          <a:p>
+            <a:pPr>
+              <a:spcAft>
+                <a:spcPts val="400"/>
+              </a:spcAft>
+            </a:pPr>
+            <a:r>
+              <a:rPr sz="1100" dirty="0">
+                <a:solidFill>
+                  <a:srgbClr val="CBD5E1"/>
+                </a:solidFill>
+              </a:rPr>
+              <a:t>② Agent Studio — every saved agent lives here: Edit, Test, Deploy, Publish, or ask it something directly. Playground gives each agent its own chat with a one-click “Suggest” example-input button.</a:t>
+            </a:r>
+          </a:p>
+        </p:txBody>
+      </p:sp>
       <p:pic>
         <p:nvPicPr>
-          <p:cNvPr id="7" name="Picture 6" descr="14_usage_audit.png"/>
+          <p:cNvPr id="10" name="Picture 9" descr="11_home.png">
+            <a:extLst>
+              <a:ext uri="{FF2B5EF4-FFF2-40B4-BE49-F238E27FC236}">
+                <a16:creationId xmlns:a16="http://schemas.microsoft.com/office/drawing/2014/main" id="{961B9171-039C-BA53-D873-0BDC693AF21D}"/>
+              </a:ext>
+            </a:extLst>
+          </p:cNvPr>
           <p:cNvPicPr>
             <a:picLocks noChangeAspect="1"/>
           </p:cNvPicPr>
@@ -36439,7 +38385,7 @@
         </p:blipFill>
         <p:spPr>
           <a:xfrm>
-            <a:off x="6172200" y="1051560"/>
+            <a:off x="457200" y="1051560"/>
             <a:ext cx="5486400" cy="3086100"/>
           </a:xfrm>
           <a:prstGeom prst="rect">
@@ -36452,59 +38398,6 @@
           </a:ln>
         </p:spPr>
       </p:pic>
-      <p:sp>
-        <p:nvSpPr>
-          <p:cNvPr id="8" name="TextBox 7"/>
-          <p:cNvSpPr txBox="1"/>
-          <p:nvPr/>
-        </p:nvSpPr>
-        <p:spPr>
-          <a:xfrm>
-            <a:off x="457200" y="5440680"/>
-            <a:ext cx="11247120" cy="1188720"/>
-          </a:xfrm>
-          <a:prstGeom prst="rect">
-            <a:avLst/>
-          </a:prstGeom>
-          <a:noFill/>
-        </p:spPr>
-        <p:txBody>
-          <a:bodyPr wrap="square">
-            <a:spAutoFit/>
-          </a:bodyPr>
-          <a:lstStyle/>
-          <a:p>
-            <a:pPr>
-              <a:spcAft>
-                <a:spcPts val="400"/>
-              </a:spcAft>
-            </a:pPr>
-            <a:r>
-              <a:rPr sz="1100">
-                <a:solidFill>
-                  <a:srgbClr val="CBD5E1"/>
-                </a:solidFill>
-              </a:rPr>
-              <a:t>① Control Plane — live platform health: active agents, runs, guardrail triggers, and average latency in one dashboard, refreshed in real time.</a:t>
-            </a:r>
-          </a:p>
-          <a:p>
-            <a:pPr>
-              <a:spcAft>
-                <a:spcPts val="400"/>
-              </a:spcAft>
-            </a:pPr>
-            <a:r>
-              <a:rPr sz="1100">
-                <a:solidFill>
-                  <a:srgbClr val="CBD5E1"/>
-                </a:solidFill>
-              </a:rPr>
-              <a:t>② Usage &amp; Traceability — full audit-log viewer: every agent action with user, resource, input/output snapshot, guardrail trigger, latency, and trace ID, filterable by action/agent/date.</a:t>
-            </a:r>
-          </a:p>
-        </p:txBody>
-      </p:sp>
     </p:spTree>
   </p:cSld>
   <p:clrMapOvr>
@@ -36648,7 +38541,7 @@
                   <a:srgbClr val="FFFFFF"/>
                 </a:solidFill>
               </a:rPr>
-              <a:t>How To Use: Workflow Observability — Tracing &amp; Logs</a:t>
+              <a:t>How To Use: Playground — Test Any Agent Live</a:t>
             </a:r>
           </a:p>
         </p:txBody>
@@ -36686,9 +38579,62 @@
           </a:p>
         </p:txBody>
       </p:sp>
+      <p:sp>
+        <p:nvSpPr>
+          <p:cNvPr id="7" name="TextBox 6"/>
+          <p:cNvSpPr txBox="1"/>
+          <p:nvPr/>
+        </p:nvSpPr>
+        <p:spPr>
+          <a:xfrm>
+            <a:off x="457200" y="5440680"/>
+            <a:ext cx="11247120" cy="1188720"/>
+          </a:xfrm>
+          <a:prstGeom prst="rect">
+            <a:avLst/>
+          </a:prstGeom>
+          <a:noFill/>
+        </p:spPr>
+        <p:txBody>
+          <a:bodyPr wrap="square">
+            <a:spAutoFit/>
+          </a:bodyPr>
+          <a:lstStyle/>
+          <a:p>
+            <a:pPr>
+              <a:spcAft>
+                <a:spcPts val="400"/>
+              </a:spcAft>
+            </a:pPr>
+            <a:r>
+              <a:rPr sz="1100">
+                <a:solidFill>
+                  <a:srgbClr val="CBD5E1"/>
+                </a:solidFill>
+              </a:rPr>
+              <a:t>① Open any agent's Playground to see its System Prompt, Guardrails, Tools, and the exact Model it runs on (accurately resolved per agent — Local Model or Azure GPT-5.4-mini, not a stale label).</a:t>
+            </a:r>
+          </a:p>
+          <a:p>
+            <a:pPr>
+              <a:spcAft>
+                <a:spcPts val="400"/>
+              </a:spcAft>
+            </a:pPr>
+            <a:r>
+              <a:rPr sz="1100">
+                <a:solidFill>
+                  <a:srgbClr val="CBD5E1"/>
+                </a:solidFill>
+              </a:rPr>
+              <a:t>② Click Suggest for an AI-generated realistic example message tailored to that agent, or type your own — then Send to test it live and watch Session Stats (Total Runs, Avg ms) update.</a:t>
+            </a:r>
+          </a:p>
+        </p:txBody>
+      </p:sp>
       <p:pic>
         <p:nvPicPr>
-          <p:cNvPr id="6" name="Picture 5" descr="15_workflow_observability.png"/>
+          <p:cNvPr id="8" name="Picture 7" descr="10_playground_suggest.png"/>
           <p:cNvPicPr>
             <a:picLocks noChangeAspect="1"/>
           </p:cNvPicPr>
@@ -36702,8 +38648,8 @@
         </p:blipFill>
         <p:spPr>
           <a:xfrm>
-            <a:off x="1737360" y="1051560"/>
-            <a:ext cx="8686800" cy="4886325"/>
+            <a:off x="2651760" y="1051560"/>
+            <a:ext cx="6858000" cy="3857625"/>
           </a:xfrm>
           <a:prstGeom prst="rect">
             <a:avLst/>
@@ -36715,59 +38661,6 @@
           </a:ln>
         </p:spPr>
       </p:pic>
-      <p:sp>
-        <p:nvSpPr>
-          <p:cNvPr id="7" name="TextBox 6"/>
-          <p:cNvSpPr txBox="1"/>
-          <p:nvPr/>
-        </p:nvSpPr>
-        <p:spPr>
-          <a:xfrm>
-            <a:off x="457200" y="5440680"/>
-            <a:ext cx="11247120" cy="1188720"/>
-          </a:xfrm>
-          <a:prstGeom prst="rect">
-            <a:avLst/>
-          </a:prstGeom>
-          <a:noFill/>
-        </p:spPr>
-        <p:txBody>
-          <a:bodyPr wrap="square">
-            <a:spAutoFit/>
-          </a:bodyPr>
-          <a:lstStyle/>
-          <a:p>
-            <a:pPr>
-              <a:spcAft>
-                <a:spcPts val="400"/>
-              </a:spcAft>
-            </a:pPr>
-            <a:r>
-              <a:rPr sz="1100">
-                <a:solidFill>
-                  <a:srgbClr val="CBD5E1"/>
-                </a:solidFill>
-              </a:rPr>
-              <a:t>① Every workflow run is logged here with per-node execution trace, total duration, and final status — including an “Awaiting Approval” count with a direct “Review →” link for paused runs.</a:t>
-            </a:r>
-          </a:p>
-          <a:p>
-            <a:pPr>
-              <a:spcAft>
-                <a:spcPts val="400"/>
-              </a:spcAft>
-            </a:pPr>
-            <a:r>
-              <a:rPr sz="1100">
-                <a:solidFill>
-                  <a:srgbClr val="CBD5E1"/>
-                </a:solidFill>
-              </a:rPr>
-              <a:t>② Backed by real OpenTelemetry spans on every LLM call, so a slow or failed run can be traced back to the exact node, prompt, and latency that caused it — not a black box.</a:t>
-            </a:r>
-          </a:p>
-        </p:txBody>
-      </p:sp>
     </p:spTree>
   </p:cSld>
   <p:clrMapOvr>
@@ -37779,6 +39672,887 @@
         <p:spPr>
           <a:xfrm>
             <a:off x="0" y="0"/>
+            <a:ext cx="12188825" cy="6858000"/>
+          </a:xfrm>
+          <a:prstGeom prst="rect">
+            <a:avLst/>
+          </a:prstGeom>
+          <a:solidFill>
+            <a:srgbClr val="0F172A"/>
+          </a:solidFill>
+          <a:ln>
+            <a:noFill/>
+          </a:ln>
+          <a:effectLst/>
+        </p:spPr>
+        <p:style>
+          <a:lnRef idx="1">
+            <a:schemeClr val="accent1"/>
+          </a:lnRef>
+          <a:fillRef idx="3">
+            <a:schemeClr val="accent1"/>
+          </a:fillRef>
+          <a:effectRef idx="2">
+            <a:schemeClr val="accent1"/>
+          </a:effectRef>
+          <a:fontRef idx="minor">
+            <a:schemeClr val="lt1"/>
+          </a:fontRef>
+        </p:style>
+        <p:txBody>
+          <a:bodyPr rtlCol="0" anchor="ctr"/>
+          <a:lstStyle/>
+          <a:p>
+            <a:pPr algn="ctr"/>
+            <a:endParaRPr/>
+          </a:p>
+        </p:txBody>
+      </p:sp>
+      <p:sp>
+        <p:nvSpPr>
+          <p:cNvPr id="3" name="Rectangle 2"/>
+          <p:cNvSpPr/>
+          <p:nvPr/>
+        </p:nvSpPr>
+        <p:spPr>
+          <a:xfrm>
+            <a:off x="0" y="73152"/>
+            <a:ext cx="12188825" cy="45720"/>
+          </a:xfrm>
+          <a:prstGeom prst="rect">
+            <a:avLst/>
+          </a:prstGeom>
+          <a:solidFill>
+            <a:srgbClr val="606EF5"/>
+          </a:solidFill>
+          <a:ln>
+            <a:noFill/>
+          </a:ln>
+          <a:effectLst/>
+        </p:spPr>
+        <p:style>
+          <a:lnRef idx="1">
+            <a:schemeClr val="accent1"/>
+          </a:lnRef>
+          <a:fillRef idx="3">
+            <a:schemeClr val="accent1"/>
+          </a:fillRef>
+          <a:effectRef idx="2">
+            <a:schemeClr val="accent1"/>
+          </a:effectRef>
+          <a:fontRef idx="minor">
+            <a:schemeClr val="lt1"/>
+          </a:fontRef>
+        </p:style>
+        <p:txBody>
+          <a:bodyPr rtlCol="0" anchor="ctr"/>
+          <a:lstStyle/>
+          <a:p>
+            <a:pPr algn="ctr"/>
+            <a:endParaRPr/>
+          </a:p>
+        </p:txBody>
+      </p:sp>
+      <p:sp>
+        <p:nvSpPr>
+          <p:cNvPr id="4" name="TextBox 3"/>
+          <p:cNvSpPr txBox="1"/>
+          <p:nvPr/>
+        </p:nvSpPr>
+        <p:spPr>
+          <a:xfrm>
+            <a:off x="457200" y="274320"/>
+            <a:ext cx="10972800" cy="492443"/>
+          </a:xfrm>
+          <a:prstGeom prst="rect">
+            <a:avLst/>
+          </a:prstGeom>
+          <a:noFill/>
+        </p:spPr>
+        <p:txBody>
+          <a:bodyPr wrap="square">
+            <a:spAutoFit/>
+          </a:bodyPr>
+          <a:lstStyle/>
+          <a:p>
+            <a:r>
+              <a:rPr sz="2600" b="1" dirty="0">
+                <a:solidFill>
+                  <a:srgbClr val="FFFFFF"/>
+                </a:solidFill>
+              </a:rPr>
+              <a:t>How To Use: </a:t>
+            </a:r>
+            <a:r>
+              <a:rPr lang="en-US" sz="2600" b="1" dirty="0">
+                <a:solidFill>
+                  <a:srgbClr val="FFFFFF"/>
+                </a:solidFill>
+              </a:rPr>
+              <a:t>Architect</a:t>
+            </a:r>
+            <a:r>
+              <a:rPr sz="2600" b="1" dirty="0">
+                <a:solidFill>
+                  <a:srgbClr val="FFFFFF"/>
+                </a:solidFill>
+              </a:rPr>
+              <a:t> &amp; Prompt Library</a:t>
+            </a:r>
+          </a:p>
+        </p:txBody>
+      </p:sp>
+      <p:sp>
+        <p:nvSpPr>
+          <p:cNvPr id="5" name="TextBox 4"/>
+          <p:cNvSpPr txBox="1"/>
+          <p:nvPr/>
+        </p:nvSpPr>
+        <p:spPr>
+          <a:xfrm>
+            <a:off x="11731752" y="6492240"/>
+            <a:ext cx="457200" cy="320040"/>
+          </a:xfrm>
+          <a:prstGeom prst="rect">
+            <a:avLst/>
+          </a:prstGeom>
+          <a:noFill/>
+        </p:spPr>
+        <p:txBody>
+          <a:bodyPr wrap="none">
+            <a:spAutoFit/>
+          </a:bodyPr>
+          <a:lstStyle/>
+          <a:p>
+            <a:r>
+              <a:rPr sz="1100">
+                <a:solidFill>
+                  <a:srgbClr val="CBD5E1"/>
+                </a:solidFill>
+              </a:rPr>
+              <a:t>40</a:t>
+            </a:r>
+          </a:p>
+        </p:txBody>
+      </p:sp>
+      <p:pic>
+        <p:nvPicPr>
+          <p:cNvPr id="7" name="Picture 6" descr="12_prompt_library.png"/>
+          <p:cNvPicPr>
+            <a:picLocks noChangeAspect="1"/>
+          </p:cNvPicPr>
+          <p:nvPr/>
+        </p:nvPicPr>
+        <p:blipFill>
+          <a:blip r:embed="rId2"/>
+          <a:stretch>
+            <a:fillRect/>
+          </a:stretch>
+        </p:blipFill>
+        <p:spPr>
+          <a:xfrm>
+            <a:off x="6172200" y="1051560"/>
+            <a:ext cx="5486400" cy="3086100"/>
+          </a:xfrm>
+          <a:prstGeom prst="rect">
+            <a:avLst/>
+          </a:prstGeom>
+          <a:ln w="12700">
+            <a:solidFill>
+              <a:srgbClr val="334155"/>
+            </a:solidFill>
+          </a:ln>
+        </p:spPr>
+      </p:pic>
+      <p:sp>
+        <p:nvSpPr>
+          <p:cNvPr id="8" name="TextBox 7"/>
+          <p:cNvSpPr txBox="1"/>
+          <p:nvPr/>
+        </p:nvSpPr>
+        <p:spPr>
+          <a:xfrm>
+            <a:off x="457200" y="5440680"/>
+            <a:ext cx="11247120" cy="872034"/>
+          </a:xfrm>
+          <a:prstGeom prst="rect">
+            <a:avLst/>
+          </a:prstGeom>
+          <a:noFill/>
+        </p:spPr>
+        <p:txBody>
+          <a:bodyPr wrap="square">
+            <a:spAutoFit/>
+          </a:bodyPr>
+          <a:lstStyle/>
+          <a:p>
+            <a:pPr>
+              <a:spcAft>
+                <a:spcPts val="400"/>
+              </a:spcAft>
+            </a:pPr>
+            <a:r>
+              <a:rPr lang="en-US" sz="1100" dirty="0">
+                <a:solidFill>
+                  <a:srgbClr val="CBD5E1"/>
+                </a:solidFill>
+              </a:rPr>
+              <a:t>① Architect — describe what you want to build in plain English; it asks clarifying questions, then generates a full Plan / Agents / App / Database, downloadable as a RAG Scaffold or Custom Code ZIP.</a:t>
+            </a:r>
+          </a:p>
+          <a:p>
+            <a:pPr>
+              <a:spcAft>
+                <a:spcPts val="400"/>
+              </a:spcAft>
+            </a:pPr>
+            <a:endParaRPr sz="1100" dirty="0">
+              <a:solidFill>
+                <a:srgbClr val="CBD5E1"/>
+              </a:solidFill>
+            </a:endParaRPr>
+          </a:p>
+          <a:p>
+            <a:pPr>
+              <a:spcAft>
+                <a:spcPts val="400"/>
+              </a:spcAft>
+            </a:pPr>
+            <a:r>
+              <a:rPr sz="1100" dirty="0">
+                <a:solidFill>
+                  <a:srgbClr val="CBD5E1"/>
+                </a:solidFill>
+              </a:rPr>
+              <a:t>② Prompt Library — 46+ curated multi-agent prompts across 10 domains (Support, Sales, Legal, HR, Data, and more); search, preview, and copy straight into Architect or Agent Studio.</a:t>
+            </a:r>
+          </a:p>
+        </p:txBody>
+      </p:sp>
+      <p:pic>
+        <p:nvPicPr>
+          <p:cNvPr id="10" name="Picture 9" descr="07_architect.png">
+            <a:extLst>
+              <a:ext uri="{FF2B5EF4-FFF2-40B4-BE49-F238E27FC236}">
+                <a16:creationId xmlns:a16="http://schemas.microsoft.com/office/drawing/2014/main" id="{A6EA2B05-A44A-923C-6A12-9B1083B342D1}"/>
+              </a:ext>
+            </a:extLst>
+          </p:cNvPr>
+          <p:cNvPicPr>
+            <a:picLocks noChangeAspect="1"/>
+          </p:cNvPicPr>
+          <p:nvPr/>
+        </p:nvPicPr>
+        <p:blipFill>
+          <a:blip r:embed="rId3"/>
+          <a:stretch>
+            <a:fillRect/>
+          </a:stretch>
+        </p:blipFill>
+        <p:spPr>
+          <a:xfrm>
+            <a:off x="457200" y="1051560"/>
+            <a:ext cx="5486400" cy="3086100"/>
+          </a:xfrm>
+          <a:prstGeom prst="rect">
+            <a:avLst/>
+          </a:prstGeom>
+          <a:ln w="12700">
+            <a:solidFill>
+              <a:srgbClr val="334155"/>
+            </a:solidFill>
+          </a:ln>
+        </p:spPr>
+      </p:pic>
+    </p:spTree>
+  </p:cSld>
+  <p:clrMapOvr>
+    <a:masterClrMapping/>
+  </p:clrMapOvr>
+</p:sld>
+</file>
+
+<file path=ppt/slides/slide41.xml><?xml version="1.0" encoding="utf-8"?>
+<p:sld xmlns:a="http://schemas.openxmlformats.org/drawingml/2006/main" xmlns:r="http://schemas.openxmlformats.org/officeDocument/2006/relationships" xmlns:p="http://schemas.openxmlformats.org/presentationml/2006/main">
+  <p:cSld>
+    <p:spTree>
+      <p:nvGrpSpPr>
+        <p:cNvPr id="1" name=""/>
+        <p:cNvGrpSpPr/>
+        <p:nvPr/>
+      </p:nvGrpSpPr>
+      <p:grpSpPr>
+        <a:xfrm>
+          <a:off x="0" y="0"/>
+          <a:ext cx="0" cy="0"/>
+          <a:chOff x="0" y="0"/>
+          <a:chExt cx="0" cy="0"/>
+        </a:xfrm>
+      </p:grpSpPr>
+      <p:sp>
+        <p:nvSpPr>
+          <p:cNvPr id="2" name="Rectangle 1"/>
+          <p:cNvSpPr/>
+          <p:nvPr/>
+        </p:nvSpPr>
+        <p:spPr>
+          <a:xfrm>
+            <a:off x="0" y="0"/>
+            <a:ext cx="12188825" cy="6858000"/>
+          </a:xfrm>
+          <a:prstGeom prst="rect">
+            <a:avLst/>
+          </a:prstGeom>
+          <a:solidFill>
+            <a:srgbClr val="0F172A"/>
+          </a:solidFill>
+          <a:ln>
+            <a:noFill/>
+          </a:ln>
+          <a:effectLst/>
+        </p:spPr>
+        <p:style>
+          <a:lnRef idx="1">
+            <a:schemeClr val="accent1"/>
+          </a:lnRef>
+          <a:fillRef idx="3">
+            <a:schemeClr val="accent1"/>
+          </a:fillRef>
+          <a:effectRef idx="2">
+            <a:schemeClr val="accent1"/>
+          </a:effectRef>
+          <a:fontRef idx="minor">
+            <a:schemeClr val="lt1"/>
+          </a:fontRef>
+        </p:style>
+        <p:txBody>
+          <a:bodyPr rtlCol="0" anchor="ctr"/>
+          <a:lstStyle/>
+          <a:p>
+            <a:pPr algn="ctr"/>
+            <a:endParaRPr/>
+          </a:p>
+        </p:txBody>
+      </p:sp>
+      <p:sp>
+        <p:nvSpPr>
+          <p:cNvPr id="3" name="Rectangle 2"/>
+          <p:cNvSpPr/>
+          <p:nvPr/>
+        </p:nvSpPr>
+        <p:spPr>
+          <a:xfrm>
+            <a:off x="0" y="73152"/>
+            <a:ext cx="12188825" cy="45720"/>
+          </a:xfrm>
+          <a:prstGeom prst="rect">
+            <a:avLst/>
+          </a:prstGeom>
+          <a:solidFill>
+            <a:srgbClr val="606EF5"/>
+          </a:solidFill>
+          <a:ln>
+            <a:noFill/>
+          </a:ln>
+          <a:effectLst/>
+        </p:spPr>
+        <p:style>
+          <a:lnRef idx="1">
+            <a:schemeClr val="accent1"/>
+          </a:lnRef>
+          <a:fillRef idx="3">
+            <a:schemeClr val="accent1"/>
+          </a:fillRef>
+          <a:effectRef idx="2">
+            <a:schemeClr val="accent1"/>
+          </a:effectRef>
+          <a:fontRef idx="minor">
+            <a:schemeClr val="lt1"/>
+          </a:fontRef>
+        </p:style>
+        <p:txBody>
+          <a:bodyPr rtlCol="0" anchor="ctr"/>
+          <a:lstStyle/>
+          <a:p>
+            <a:pPr algn="ctr"/>
+            <a:endParaRPr/>
+          </a:p>
+        </p:txBody>
+      </p:sp>
+      <p:sp>
+        <p:nvSpPr>
+          <p:cNvPr id="4" name="TextBox 3"/>
+          <p:cNvSpPr txBox="1"/>
+          <p:nvPr/>
+        </p:nvSpPr>
+        <p:spPr>
+          <a:xfrm>
+            <a:off x="457200" y="274320"/>
+            <a:ext cx="10972800" cy="548640"/>
+          </a:xfrm>
+          <a:prstGeom prst="rect">
+            <a:avLst/>
+          </a:prstGeom>
+          <a:noFill/>
+        </p:spPr>
+        <p:txBody>
+          <a:bodyPr wrap="square">
+            <a:spAutoFit/>
+          </a:bodyPr>
+          <a:lstStyle/>
+          <a:p>
+            <a:r>
+              <a:rPr sz="2600" b="1">
+                <a:solidFill>
+                  <a:srgbClr val="FFFFFF"/>
+                </a:solidFill>
+              </a:rPr>
+              <a:t>How To Use: Control Plane &amp; Audit Traceability</a:t>
+            </a:r>
+          </a:p>
+        </p:txBody>
+      </p:sp>
+      <p:sp>
+        <p:nvSpPr>
+          <p:cNvPr id="5" name="TextBox 4"/>
+          <p:cNvSpPr txBox="1"/>
+          <p:nvPr/>
+        </p:nvSpPr>
+        <p:spPr>
+          <a:xfrm>
+            <a:off x="11731752" y="6492240"/>
+            <a:ext cx="457200" cy="320040"/>
+          </a:xfrm>
+          <a:prstGeom prst="rect">
+            <a:avLst/>
+          </a:prstGeom>
+          <a:noFill/>
+        </p:spPr>
+        <p:txBody>
+          <a:bodyPr wrap="none">
+            <a:spAutoFit/>
+          </a:bodyPr>
+          <a:lstStyle/>
+          <a:p>
+            <a:r>
+              <a:rPr sz="1100">
+                <a:solidFill>
+                  <a:srgbClr val="CBD5E1"/>
+                </a:solidFill>
+              </a:rPr>
+              <a:t>41</a:t>
+            </a:r>
+          </a:p>
+        </p:txBody>
+      </p:sp>
+      <p:pic>
+        <p:nvPicPr>
+          <p:cNvPr id="6" name="Picture 5" descr="13_control_plane.png"/>
+          <p:cNvPicPr>
+            <a:picLocks noChangeAspect="1"/>
+          </p:cNvPicPr>
+          <p:nvPr/>
+        </p:nvPicPr>
+        <p:blipFill>
+          <a:blip r:embed="rId2"/>
+          <a:stretch>
+            <a:fillRect/>
+          </a:stretch>
+        </p:blipFill>
+        <p:spPr>
+          <a:xfrm>
+            <a:off x="457200" y="1051560"/>
+            <a:ext cx="5486400" cy="3086100"/>
+          </a:xfrm>
+          <a:prstGeom prst="rect">
+            <a:avLst/>
+          </a:prstGeom>
+          <a:ln w="12700">
+            <a:solidFill>
+              <a:srgbClr val="334155"/>
+            </a:solidFill>
+          </a:ln>
+        </p:spPr>
+      </p:pic>
+      <p:pic>
+        <p:nvPicPr>
+          <p:cNvPr id="7" name="Picture 6" descr="14_usage_audit.png"/>
+          <p:cNvPicPr>
+            <a:picLocks noChangeAspect="1"/>
+          </p:cNvPicPr>
+          <p:nvPr/>
+        </p:nvPicPr>
+        <p:blipFill>
+          <a:blip r:embed="rId3"/>
+          <a:stretch>
+            <a:fillRect/>
+          </a:stretch>
+        </p:blipFill>
+        <p:spPr>
+          <a:xfrm>
+            <a:off x="6172200" y="1051560"/>
+            <a:ext cx="5486400" cy="3086100"/>
+          </a:xfrm>
+          <a:prstGeom prst="rect">
+            <a:avLst/>
+          </a:prstGeom>
+          <a:ln w="12700">
+            <a:solidFill>
+              <a:srgbClr val="334155"/>
+            </a:solidFill>
+          </a:ln>
+        </p:spPr>
+      </p:pic>
+      <p:sp>
+        <p:nvSpPr>
+          <p:cNvPr id="8" name="TextBox 7"/>
+          <p:cNvSpPr txBox="1"/>
+          <p:nvPr/>
+        </p:nvSpPr>
+        <p:spPr>
+          <a:xfrm>
+            <a:off x="457200" y="5440680"/>
+            <a:ext cx="11247120" cy="1188720"/>
+          </a:xfrm>
+          <a:prstGeom prst="rect">
+            <a:avLst/>
+          </a:prstGeom>
+          <a:noFill/>
+        </p:spPr>
+        <p:txBody>
+          <a:bodyPr wrap="square">
+            <a:spAutoFit/>
+          </a:bodyPr>
+          <a:lstStyle/>
+          <a:p>
+            <a:pPr>
+              <a:spcAft>
+                <a:spcPts val="400"/>
+              </a:spcAft>
+            </a:pPr>
+            <a:r>
+              <a:rPr sz="1100">
+                <a:solidFill>
+                  <a:srgbClr val="CBD5E1"/>
+                </a:solidFill>
+              </a:rPr>
+              <a:t>① Control Plane — live platform health: active agents, runs, guardrail triggers, and average latency in one dashboard, refreshed in real time.</a:t>
+            </a:r>
+          </a:p>
+          <a:p>
+            <a:pPr>
+              <a:spcAft>
+                <a:spcPts val="400"/>
+              </a:spcAft>
+            </a:pPr>
+            <a:r>
+              <a:rPr sz="1100">
+                <a:solidFill>
+                  <a:srgbClr val="CBD5E1"/>
+                </a:solidFill>
+              </a:rPr>
+              <a:t>② Usage &amp; Traceability — full audit-log viewer: every agent action with user, resource, input/output snapshot, guardrail trigger, latency, and trace ID, filterable by action/agent/date.</a:t>
+            </a:r>
+          </a:p>
+        </p:txBody>
+      </p:sp>
+    </p:spTree>
+  </p:cSld>
+  <p:clrMapOvr>
+    <a:masterClrMapping/>
+  </p:clrMapOvr>
+</p:sld>
+</file>
+
+<file path=ppt/slides/slide42.xml><?xml version="1.0" encoding="utf-8"?>
+<p:sld xmlns:a="http://schemas.openxmlformats.org/drawingml/2006/main" xmlns:r="http://schemas.openxmlformats.org/officeDocument/2006/relationships" xmlns:p="http://schemas.openxmlformats.org/presentationml/2006/main">
+  <p:cSld>
+    <p:spTree>
+      <p:nvGrpSpPr>
+        <p:cNvPr id="1" name=""/>
+        <p:cNvGrpSpPr/>
+        <p:nvPr/>
+      </p:nvGrpSpPr>
+      <p:grpSpPr>
+        <a:xfrm>
+          <a:off x="0" y="0"/>
+          <a:ext cx="0" cy="0"/>
+          <a:chOff x="0" y="0"/>
+          <a:chExt cx="0" cy="0"/>
+        </a:xfrm>
+      </p:grpSpPr>
+      <p:sp>
+        <p:nvSpPr>
+          <p:cNvPr id="2" name="Rectangle 1"/>
+          <p:cNvSpPr/>
+          <p:nvPr/>
+        </p:nvSpPr>
+        <p:spPr>
+          <a:xfrm>
+            <a:off x="0" y="0"/>
+            <a:ext cx="12188825" cy="6858000"/>
+          </a:xfrm>
+          <a:prstGeom prst="rect">
+            <a:avLst/>
+          </a:prstGeom>
+          <a:solidFill>
+            <a:srgbClr val="0F172A"/>
+          </a:solidFill>
+          <a:ln>
+            <a:noFill/>
+          </a:ln>
+          <a:effectLst/>
+        </p:spPr>
+        <p:style>
+          <a:lnRef idx="1">
+            <a:schemeClr val="accent1"/>
+          </a:lnRef>
+          <a:fillRef idx="3">
+            <a:schemeClr val="accent1"/>
+          </a:fillRef>
+          <a:effectRef idx="2">
+            <a:schemeClr val="accent1"/>
+          </a:effectRef>
+          <a:fontRef idx="minor">
+            <a:schemeClr val="lt1"/>
+          </a:fontRef>
+        </p:style>
+        <p:txBody>
+          <a:bodyPr rtlCol="0" anchor="ctr"/>
+          <a:lstStyle/>
+          <a:p>
+            <a:pPr algn="ctr"/>
+            <a:endParaRPr/>
+          </a:p>
+        </p:txBody>
+      </p:sp>
+      <p:sp>
+        <p:nvSpPr>
+          <p:cNvPr id="3" name="Rectangle 2"/>
+          <p:cNvSpPr/>
+          <p:nvPr/>
+        </p:nvSpPr>
+        <p:spPr>
+          <a:xfrm>
+            <a:off x="0" y="73152"/>
+            <a:ext cx="12188825" cy="45720"/>
+          </a:xfrm>
+          <a:prstGeom prst="rect">
+            <a:avLst/>
+          </a:prstGeom>
+          <a:solidFill>
+            <a:srgbClr val="606EF5"/>
+          </a:solidFill>
+          <a:ln>
+            <a:noFill/>
+          </a:ln>
+          <a:effectLst/>
+        </p:spPr>
+        <p:style>
+          <a:lnRef idx="1">
+            <a:schemeClr val="accent1"/>
+          </a:lnRef>
+          <a:fillRef idx="3">
+            <a:schemeClr val="accent1"/>
+          </a:fillRef>
+          <a:effectRef idx="2">
+            <a:schemeClr val="accent1"/>
+          </a:effectRef>
+          <a:fontRef idx="minor">
+            <a:schemeClr val="lt1"/>
+          </a:fontRef>
+        </p:style>
+        <p:txBody>
+          <a:bodyPr rtlCol="0" anchor="ctr"/>
+          <a:lstStyle/>
+          <a:p>
+            <a:pPr algn="ctr"/>
+            <a:endParaRPr/>
+          </a:p>
+        </p:txBody>
+      </p:sp>
+      <p:sp>
+        <p:nvSpPr>
+          <p:cNvPr id="4" name="TextBox 3"/>
+          <p:cNvSpPr txBox="1"/>
+          <p:nvPr/>
+        </p:nvSpPr>
+        <p:spPr>
+          <a:xfrm>
+            <a:off x="457200" y="274320"/>
+            <a:ext cx="10972800" cy="548640"/>
+          </a:xfrm>
+          <a:prstGeom prst="rect">
+            <a:avLst/>
+          </a:prstGeom>
+          <a:noFill/>
+        </p:spPr>
+        <p:txBody>
+          <a:bodyPr wrap="square">
+            <a:spAutoFit/>
+          </a:bodyPr>
+          <a:lstStyle/>
+          <a:p>
+            <a:r>
+              <a:rPr sz="2600" b="1">
+                <a:solidFill>
+                  <a:srgbClr val="FFFFFF"/>
+                </a:solidFill>
+              </a:rPr>
+              <a:t>How To Use: Workflow Observability — Tracing &amp; Logs</a:t>
+            </a:r>
+          </a:p>
+        </p:txBody>
+      </p:sp>
+      <p:sp>
+        <p:nvSpPr>
+          <p:cNvPr id="5" name="TextBox 4"/>
+          <p:cNvSpPr txBox="1"/>
+          <p:nvPr/>
+        </p:nvSpPr>
+        <p:spPr>
+          <a:xfrm>
+            <a:off x="11731752" y="6492240"/>
+            <a:ext cx="457200" cy="320040"/>
+          </a:xfrm>
+          <a:prstGeom prst="rect">
+            <a:avLst/>
+          </a:prstGeom>
+          <a:noFill/>
+        </p:spPr>
+        <p:txBody>
+          <a:bodyPr wrap="none">
+            <a:spAutoFit/>
+          </a:bodyPr>
+          <a:lstStyle/>
+          <a:p>
+            <a:r>
+              <a:rPr sz="1100">
+                <a:solidFill>
+                  <a:srgbClr val="CBD5E1"/>
+                </a:solidFill>
+              </a:rPr>
+              <a:t>42</a:t>
+            </a:r>
+          </a:p>
+        </p:txBody>
+      </p:sp>
+      <p:pic>
+        <p:nvPicPr>
+          <p:cNvPr id="6" name="Picture 5" descr="15_workflow_observability.png"/>
+          <p:cNvPicPr>
+            <a:picLocks noChangeAspect="1"/>
+          </p:cNvPicPr>
+          <p:nvPr/>
+        </p:nvPicPr>
+        <p:blipFill>
+          <a:blip r:embed="rId2"/>
+          <a:stretch>
+            <a:fillRect/>
+          </a:stretch>
+        </p:blipFill>
+        <p:spPr>
+          <a:xfrm>
+            <a:off x="1737360" y="1051560"/>
+            <a:ext cx="8686800" cy="4886325"/>
+          </a:xfrm>
+          <a:prstGeom prst="rect">
+            <a:avLst/>
+          </a:prstGeom>
+          <a:ln w="12700">
+            <a:solidFill>
+              <a:srgbClr val="334155"/>
+            </a:solidFill>
+          </a:ln>
+        </p:spPr>
+      </p:pic>
+      <p:sp>
+        <p:nvSpPr>
+          <p:cNvPr id="7" name="TextBox 6"/>
+          <p:cNvSpPr txBox="1"/>
+          <p:nvPr/>
+        </p:nvSpPr>
+        <p:spPr>
+          <a:xfrm>
+            <a:off x="457200" y="5440680"/>
+            <a:ext cx="11247120" cy="1188720"/>
+          </a:xfrm>
+          <a:prstGeom prst="rect">
+            <a:avLst/>
+          </a:prstGeom>
+          <a:noFill/>
+        </p:spPr>
+        <p:txBody>
+          <a:bodyPr wrap="square">
+            <a:spAutoFit/>
+          </a:bodyPr>
+          <a:lstStyle/>
+          <a:p>
+            <a:pPr>
+              <a:spcAft>
+                <a:spcPts val="400"/>
+              </a:spcAft>
+            </a:pPr>
+            <a:r>
+              <a:rPr sz="1100">
+                <a:solidFill>
+                  <a:srgbClr val="CBD5E1"/>
+                </a:solidFill>
+              </a:rPr>
+              <a:t>① Every workflow run is logged here with per-node execution trace, total duration, and final status — including an “Awaiting Approval” count with a direct “Review →” link for paused runs.</a:t>
+            </a:r>
+          </a:p>
+          <a:p>
+            <a:pPr>
+              <a:spcAft>
+                <a:spcPts val="400"/>
+              </a:spcAft>
+            </a:pPr>
+            <a:r>
+              <a:rPr sz="1100">
+                <a:solidFill>
+                  <a:srgbClr val="CBD5E1"/>
+                </a:solidFill>
+              </a:rPr>
+              <a:t>② Backed by real OpenTelemetry spans on every LLM call, so a slow or failed run can be traced back to the exact node, prompt, and latency that caused it — not a black box.</a:t>
+            </a:r>
+          </a:p>
+        </p:txBody>
+      </p:sp>
+    </p:spTree>
+  </p:cSld>
+  <p:clrMapOvr>
+    <a:masterClrMapping/>
+  </p:clrMapOvr>
+</p:sld>
+</file>
+
+<file path=ppt/slides/slide43.xml><?xml version="1.0" encoding="utf-8"?>
+<p:sld xmlns:a="http://schemas.openxmlformats.org/drawingml/2006/main" xmlns:r="http://schemas.openxmlformats.org/officeDocument/2006/relationships" xmlns:p="http://schemas.openxmlformats.org/presentationml/2006/main">
+  <p:cSld>
+    <p:spTree>
+      <p:nvGrpSpPr>
+        <p:cNvPr id="1" name=""/>
+        <p:cNvGrpSpPr/>
+        <p:nvPr/>
+      </p:nvGrpSpPr>
+      <p:grpSpPr>
+        <a:xfrm>
+          <a:off x="0" y="0"/>
+          <a:ext cx="0" cy="0"/>
+          <a:chOff x="0" y="0"/>
+          <a:chExt cx="0" cy="0"/>
+        </a:xfrm>
+      </p:grpSpPr>
+      <p:sp>
+        <p:nvSpPr>
+          <p:cNvPr id="2" name="Rectangle 1"/>
+          <p:cNvSpPr/>
+          <p:nvPr/>
+        </p:nvSpPr>
+        <p:spPr>
+          <a:xfrm>
+            <a:off x="0" y="0"/>
             <a:ext cx="12188952" cy="6858000"/>
           </a:xfrm>
           <a:prstGeom prst="rect">
@@ -39076,7 +41850,7 @@
                   <a:srgbClr val="CBD5E1"/>
                 </a:solidFill>
               </a:rPr>
-              <a:t>Manager agent fans out to N worker agents concurrently. Aggregates results. Supports sequential &amp; parallel patterns.</a:t>
+              <a:t>Manager agent dynamically decides which worker agents to invoke and in what order (sequential in v1, real end-to-end wiring shipped this cycle).</a:t>
             </a:r>
           </a:p>
         </p:txBody>
@@ -48357,6 +51131,47 @@
                 </a:solidFill>
               </a:rPr>
               <a:t>7</a:t>
+            </a:r>
+          </a:p>
+        </p:txBody>
+      </p:sp>
+      <p:sp>
+        <p:nvSpPr>
+          <p:cNvPr id="187" name="TextBox 186"/>
+          <p:cNvSpPr txBox="1"/>
+          <p:nvPr/>
+        </p:nvSpPr>
+        <p:spPr>
+          <a:xfrm>
+            <a:off x="320040" y="5980000"/>
+            <a:ext cx="10972800" cy="457200"/>
+          </a:xfrm>
+          <a:prstGeom prst="rect">
+            <a:avLst/>
+          </a:prstGeom>
+          <a:noFill/>
+        </p:spPr>
+        <p:txBody>
+          <a:bodyPr wrap="square">
+            <a:spAutoFit/>
+          </a:bodyPr>
+          <a:lstStyle/>
+          <a:p>
+            <a:r>
+              <a:rPr sz="1100" b="1">
+                <a:solidFill>
+                  <a:srgbClr val="F59E0B"/>
+                </a:solidFill>
+              </a:rPr>
+              <a:t>Known internal gaps (not shown above, tracked separately): </a:t>
+            </a:r>
+            <a:r>
+              <a:rPr sz="1100" b="0">
+                <a:solidFill>
+                  <a:srgbClr val="CBD5E1"/>
+                </a:solidFill>
+              </a:rPr>
+              <a:t>compliance-certification docs (SOC2/HIPAA), managed vector store option (FAISS-only today), Marketplace template-breadth audit vs Lyzr -- see the Lyzr-Parity Scorecard slide for status.</a:t>
             </a:r>
           </a:p>
         </p:txBody>
